--- a/examples/recreations/26_Dropbox_w-Sandia__Vibrationdata_download/out_mat2ppt.pptx
+++ b/examples/recreations/26_Dropbox_w-Sandia__Vibrationdata_download/out_mat2ppt.pptx
@@ -1,23 +1,23 @@
 
 <file path=ppt/presentation.xml><?xml version="1.0" encoding="utf-8"?>
-<p:presentation xmlns:a="http://schemas.openxmlformats.org/drawingml/2006/main" xmlns:r="http://schemas.openxmlformats.org/officeDocument/2006/relationships" xmlns:p="http://schemas.openxmlformats.org/presentationml/2006/main" saveSubsetFonts="1" autoCompressPictures="0">
+<p:presentation xmlns:a="http://schemas.openxmlformats.org/drawingml/2006/main" xmlns:r="http://schemas.openxmlformats.org/officeDocument/2006/relationships" xmlns:p="http://schemas.openxmlformats.org/presentationml/2006/main" saveSubsetFonts="1">
   <p:sldMasterIdLst>
     <p:sldMasterId id="2147483648" r:id="rId1"/>
   </p:sldMasterIdLst>
   <p:sldIdLst>
-    <p:sldId id="256" r:id="rId7"/>
-    <p:sldId id="257" r:id="rId8"/>
-    <p:sldId id="258" r:id="rId9"/>
-    <p:sldId id="259" r:id="rId10"/>
-    <p:sldId id="260" r:id="rId11"/>
+    <p:sldId id="256" r:id="rId11"/>
+    <p:sldId id="257" r:id="rId12"/>
+    <p:sldId id="258" r:id="rId13"/>
+    <p:sldId id="259" r:id="rId14"/>
+    <p:sldId id="260" r:id="rId15"/>
   </p:sldIdLst>
-  <p:sldSz cx="12192000" cy="6858000" type="screen4x3"/>
+  <p:sldSz cx="12192000" cy="6858000"/>
   <p:notesSz cx="6858000" cy="9144000"/>
   <p:defaultTextStyle>
     <a:defPPr>
       <a:defRPr lang="en-US"/>
     </a:defPPr>
-    <a:lvl1pPr marL="0" algn="l" defTabSz="457200" rtl="0" eaLnBrk="1" latinLnBrk="0" hangingPunct="1">
+    <a:lvl1pPr marL="0" algn="l" defTabSz="914400" rtl="0" eaLnBrk="1" latinLnBrk="0" hangingPunct="1">
       <a:defRPr sz="1800" kern="1200">
         <a:solidFill>
           <a:schemeClr val="tx1"/>
@@ -27,7 +27,7 @@
         <a:cs typeface="+mn-cs"/>
       </a:defRPr>
     </a:lvl1pPr>
-    <a:lvl2pPr marL="457200" algn="l" defTabSz="457200" rtl="0" eaLnBrk="1" latinLnBrk="0" hangingPunct="1">
+    <a:lvl2pPr marL="457200" algn="l" defTabSz="914400" rtl="0" eaLnBrk="1" latinLnBrk="0" hangingPunct="1">
       <a:defRPr sz="1800" kern="1200">
         <a:solidFill>
           <a:schemeClr val="tx1"/>
@@ -37,7 +37,7 @@
         <a:cs typeface="+mn-cs"/>
       </a:defRPr>
     </a:lvl2pPr>
-    <a:lvl3pPr marL="914400" algn="l" defTabSz="457200" rtl="0" eaLnBrk="1" latinLnBrk="0" hangingPunct="1">
+    <a:lvl3pPr marL="914400" algn="l" defTabSz="914400" rtl="0" eaLnBrk="1" latinLnBrk="0" hangingPunct="1">
       <a:defRPr sz="1800" kern="1200">
         <a:solidFill>
           <a:schemeClr val="tx1"/>
@@ -47,7 +47,7 @@
         <a:cs typeface="+mn-cs"/>
       </a:defRPr>
     </a:lvl3pPr>
-    <a:lvl4pPr marL="1371600" algn="l" defTabSz="457200" rtl="0" eaLnBrk="1" latinLnBrk="0" hangingPunct="1">
+    <a:lvl4pPr marL="1371600" algn="l" defTabSz="914400" rtl="0" eaLnBrk="1" latinLnBrk="0" hangingPunct="1">
       <a:defRPr sz="1800" kern="1200">
         <a:solidFill>
           <a:schemeClr val="tx1"/>
@@ -57,7 +57,7 @@
         <a:cs typeface="+mn-cs"/>
       </a:defRPr>
     </a:lvl4pPr>
-    <a:lvl5pPr marL="1828800" algn="l" defTabSz="457200" rtl="0" eaLnBrk="1" latinLnBrk="0" hangingPunct="1">
+    <a:lvl5pPr marL="1828800" algn="l" defTabSz="914400" rtl="0" eaLnBrk="1" latinLnBrk="0" hangingPunct="1">
       <a:defRPr sz="1800" kern="1200">
         <a:solidFill>
           <a:schemeClr val="tx1"/>
@@ -67,7 +67,7 @@
         <a:cs typeface="+mn-cs"/>
       </a:defRPr>
     </a:lvl5pPr>
-    <a:lvl6pPr marL="2286000" algn="l" defTabSz="457200" rtl="0" eaLnBrk="1" latinLnBrk="0" hangingPunct="1">
+    <a:lvl6pPr marL="2286000" algn="l" defTabSz="914400" rtl="0" eaLnBrk="1" latinLnBrk="0" hangingPunct="1">
       <a:defRPr sz="1800" kern="1200">
         <a:solidFill>
           <a:schemeClr val="tx1"/>
@@ -77,7 +77,7 @@
         <a:cs typeface="+mn-cs"/>
       </a:defRPr>
     </a:lvl6pPr>
-    <a:lvl7pPr marL="2743200" algn="l" defTabSz="457200" rtl="0" eaLnBrk="1" latinLnBrk="0" hangingPunct="1">
+    <a:lvl7pPr marL="2743200" algn="l" defTabSz="914400" rtl="0" eaLnBrk="1" latinLnBrk="0" hangingPunct="1">
       <a:defRPr sz="1800" kern="1200">
         <a:solidFill>
           <a:schemeClr val="tx1"/>
@@ -87,7 +87,7 @@
         <a:cs typeface="+mn-cs"/>
       </a:defRPr>
     </a:lvl7pPr>
-    <a:lvl8pPr marL="3200400" algn="l" defTabSz="457200" rtl="0" eaLnBrk="1" latinLnBrk="0" hangingPunct="1">
+    <a:lvl8pPr marL="3200400" algn="l" defTabSz="914400" rtl="0" eaLnBrk="1" latinLnBrk="0" hangingPunct="1">
       <a:defRPr sz="1800" kern="1200">
         <a:solidFill>
           <a:schemeClr val="tx1"/>
@@ -97,7 +97,7 @@
         <a:cs typeface="+mn-cs"/>
       </a:defRPr>
     </a:lvl8pPr>
-    <a:lvl9pPr marL="3657600" algn="l" defTabSz="457200" rtl="0" eaLnBrk="1" latinLnBrk="0" hangingPunct="1">
+    <a:lvl9pPr marL="3657600" algn="l" defTabSz="914400" rtl="0" eaLnBrk="1" latinLnBrk="0" hangingPunct="1">
       <a:defRPr sz="1800" kern="1200">
         <a:solidFill>
           <a:schemeClr val="tx1"/>
@@ -108,6 +108,11 @@
       </a:defRPr>
     </a:lvl9pPr>
   </p:defaultTextStyle>
+  <p:extLst>
+    <p:ext uri="{EFAFB233-063F-42B5-8137-9DF3F51BA10A}">
+      <p15:sldGuideLst xmlns:p15="http://schemas.microsoft.com/office/powerpoint/2012/main"/>
+    </p:ext>
+  </p:extLst>
 </p:presentation>
 </file>
 
@@ -130,7 +135,13 @@
       </p:grpSpPr>
       <p:sp>
         <p:nvSpPr>
-          <p:cNvPr id="2" name="Title 1"/>
+          <p:cNvPr id="2" name="Title 1">
+            <a:extLst>
+              <a:ext uri="{FF2B5EF4-FFF2-40B4-BE49-F238E27FC236}">
+                <a16:creationId xmlns:a16="http://schemas.microsoft.com/office/drawing/2014/main" id="{9B2C3CD6-DDBD-404B-B9EF-96DA753DE875}"/>
+              </a:ext>
+            </a:extLst>
+          </p:cNvPr>
           <p:cNvSpPr>
             <a:spLocks noGrp="1"/>
           </p:cNvSpPr>
@@ -140,25 +151,34 @@
         </p:nvSpPr>
         <p:spPr>
           <a:xfrm>
-            <a:off x="685800" y="2130425"/>
-            <a:ext cx="7772400" cy="1470025"/>
+            <a:off x="1524000" y="1122363"/>
+            <a:ext cx="9144000" cy="2387600"/>
           </a:xfrm>
         </p:spPr>
         <p:txBody>
-          <a:bodyPr/>
-          <a:lstStyle/>
-          <a:p>
-            <a:r>
-              <a:rPr lang="en-US" smtClean="0"/>
+          <a:bodyPr anchor="b"/>
+          <a:lstStyle>
+            <a:lvl1pPr algn="ctr">
+              <a:defRPr sz="6000"/>
+            </a:lvl1pPr>
+          </a:lstStyle>
+          <a:p>
+            <a:r>
+              <a:rPr lang="en-US"/>
               <a:t>Click to edit Master title style</a:t>
             </a:r>
-            <a:endParaRPr lang="en-US"/>
-          </a:p>
-        </p:txBody>
-      </p:sp>
-      <p:sp>
-        <p:nvSpPr>
-          <p:cNvPr id="3" name="Subtitle 2"/>
+          </a:p>
+        </p:txBody>
+      </p:sp>
+      <p:sp>
+        <p:nvSpPr>
+          <p:cNvPr id="3" name="Subtitle 2">
+            <a:extLst>
+              <a:ext uri="{FF2B5EF4-FFF2-40B4-BE49-F238E27FC236}">
+                <a16:creationId xmlns:a16="http://schemas.microsoft.com/office/drawing/2014/main" id="{DABB3336-9657-4345-B3C1-C78034670F45}"/>
+              </a:ext>
+            </a:extLst>
+          </p:cNvPr>
           <p:cNvSpPr>
             <a:spLocks noGrp="1"/>
           </p:cNvSpPr>
@@ -168,8 +188,8 @@
         </p:nvSpPr>
         <p:spPr>
           <a:xfrm>
-            <a:off x="1371600" y="3886200"/>
-            <a:ext cx="6400800" cy="1752600"/>
+            <a:off x="1524000" y="3602038"/>
+            <a:ext cx="9144000" cy="1655762"/>
           </a:xfrm>
         </p:spPr>
         <p:txBody>
@@ -177,122 +197,73 @@
           <a:lstStyle>
             <a:lvl1pPr marL="0" indent="0" algn="ctr">
               <a:buNone/>
-              <a:defRPr>
-                <a:solidFill>
-                  <a:schemeClr val="tx1">
-                    <a:tint val="75000"/>
-                  </a:schemeClr>
-                </a:solidFill>
-              </a:defRPr>
+              <a:defRPr sz="2400"/>
             </a:lvl1pPr>
             <a:lvl2pPr marL="457200" indent="0" algn="ctr">
               <a:buNone/>
-              <a:defRPr>
-                <a:solidFill>
-                  <a:schemeClr val="tx1">
-                    <a:tint val="75000"/>
-                  </a:schemeClr>
-                </a:solidFill>
-              </a:defRPr>
+              <a:defRPr sz="2000"/>
             </a:lvl2pPr>
             <a:lvl3pPr marL="914400" indent="0" algn="ctr">
               <a:buNone/>
-              <a:defRPr>
-                <a:solidFill>
-                  <a:schemeClr val="tx1">
-                    <a:tint val="75000"/>
-                  </a:schemeClr>
-                </a:solidFill>
-              </a:defRPr>
+              <a:defRPr sz="1800"/>
             </a:lvl3pPr>
             <a:lvl4pPr marL="1371600" indent="0" algn="ctr">
               <a:buNone/>
-              <a:defRPr>
-                <a:solidFill>
-                  <a:schemeClr val="tx1">
-                    <a:tint val="75000"/>
-                  </a:schemeClr>
-                </a:solidFill>
-              </a:defRPr>
+              <a:defRPr sz="1600"/>
             </a:lvl4pPr>
             <a:lvl5pPr marL="1828800" indent="0" algn="ctr">
               <a:buNone/>
-              <a:defRPr>
-                <a:solidFill>
-                  <a:schemeClr val="tx1">
-                    <a:tint val="75000"/>
-                  </a:schemeClr>
-                </a:solidFill>
-              </a:defRPr>
+              <a:defRPr sz="1600"/>
             </a:lvl5pPr>
             <a:lvl6pPr marL="2286000" indent="0" algn="ctr">
               <a:buNone/>
-              <a:defRPr>
-                <a:solidFill>
-                  <a:schemeClr val="tx1">
-                    <a:tint val="75000"/>
-                  </a:schemeClr>
-                </a:solidFill>
-              </a:defRPr>
+              <a:defRPr sz="1600"/>
             </a:lvl6pPr>
             <a:lvl7pPr marL="2743200" indent="0" algn="ctr">
               <a:buNone/>
-              <a:defRPr>
-                <a:solidFill>
-                  <a:schemeClr val="tx1">
-                    <a:tint val="75000"/>
-                  </a:schemeClr>
-                </a:solidFill>
-              </a:defRPr>
+              <a:defRPr sz="1600"/>
             </a:lvl7pPr>
             <a:lvl8pPr marL="3200400" indent="0" algn="ctr">
               <a:buNone/>
-              <a:defRPr>
-                <a:solidFill>
-                  <a:schemeClr val="tx1">
-                    <a:tint val="75000"/>
-                  </a:schemeClr>
-                </a:solidFill>
-              </a:defRPr>
+              <a:defRPr sz="1600"/>
             </a:lvl8pPr>
             <a:lvl9pPr marL="3657600" indent="0" algn="ctr">
               <a:buNone/>
-              <a:defRPr>
-                <a:solidFill>
-                  <a:schemeClr val="tx1">
-                    <a:tint val="75000"/>
-                  </a:schemeClr>
-                </a:solidFill>
-              </a:defRPr>
+              <a:defRPr sz="1600"/>
             </a:lvl9pPr>
           </a:lstStyle>
           <a:p>
             <a:r>
+              <a:rPr lang="en-US"/>
+              <a:t>Click to edit Master subtitle style</a:t>
+            </a:r>
+          </a:p>
+        </p:txBody>
+      </p:sp>
+      <p:sp>
+        <p:nvSpPr>
+          <p:cNvPr id="4" name="Date Placeholder 3">
+            <a:extLst>
+              <a:ext uri="{FF2B5EF4-FFF2-40B4-BE49-F238E27FC236}">
+                <a16:creationId xmlns:a16="http://schemas.microsoft.com/office/drawing/2014/main" id="{D4DF9726-AACD-447A-A536-E994859259AA}"/>
+              </a:ext>
+            </a:extLst>
+          </p:cNvPr>
+          <p:cNvSpPr>
+            <a:spLocks noGrp="1"/>
+          </p:cNvSpPr>
+          <p:nvPr>
+            <p:ph type="dt" sz="half" idx="10"/>
+          </p:nvPr>
+        </p:nvSpPr>
+        <p:spPr/>
+        <p:txBody>
+          <a:bodyPr/>
+          <a:lstStyle/>
+          <a:p>
+            <a:fld id="{B11CAE26-DC4B-40B0-AA71-79A794444606}" type="datetimeFigureOut">
               <a:rPr lang="en-US" smtClean="0"/>
-              <a:t>Click to edit Master subtitle style</a:t>
-            </a:r>
-            <a:endParaRPr lang="en-US"/>
-          </a:p>
-        </p:txBody>
-      </p:sp>
-      <p:sp>
-        <p:nvSpPr>
-          <p:cNvPr id="4" name="Date Placeholder 3"/>
-          <p:cNvSpPr>
-            <a:spLocks noGrp="1"/>
-          </p:cNvSpPr>
-          <p:nvPr>
-            <p:ph type="dt" sz="half" idx="10"/>
-          </p:nvPr>
-        </p:nvSpPr>
-        <p:spPr/>
-        <p:txBody>
-          <a:bodyPr/>
-          <a:lstStyle/>
-          <a:p>
-            <a:fld id="{5BCAD085-E8A6-8845-BD4E-CB4CCA059FC4}" type="datetimeFigureOut">
-              <a:rPr lang="en-US" smtClean="0"/>
-              <a:t>1/27/13</a:t>
+              <a:t>3/2/2018</a:t>
             </a:fld>
             <a:endParaRPr lang="en-US"/>
           </a:p>
@@ -300,7 +271,13 @@
       </p:sp>
       <p:sp>
         <p:nvSpPr>
-          <p:cNvPr id="5" name="Footer Placeholder 4"/>
+          <p:cNvPr id="5" name="Footer Placeholder 4">
+            <a:extLst>
+              <a:ext uri="{FF2B5EF4-FFF2-40B4-BE49-F238E27FC236}">
+                <a16:creationId xmlns:a16="http://schemas.microsoft.com/office/drawing/2014/main" id="{2E2A0E6E-6CC3-40A0-B151-E55AA3D59E88}"/>
+              </a:ext>
+            </a:extLst>
+          </p:cNvPr>
           <p:cNvSpPr>
             <a:spLocks noGrp="1"/>
           </p:cNvSpPr>
@@ -319,7 +296,13 @@
       </p:sp>
       <p:sp>
         <p:nvSpPr>
-          <p:cNvPr id="6" name="Slide Number Placeholder 5"/>
+          <p:cNvPr id="6" name="Slide Number Placeholder 5">
+            <a:extLst>
+              <a:ext uri="{FF2B5EF4-FFF2-40B4-BE49-F238E27FC236}">
+                <a16:creationId xmlns:a16="http://schemas.microsoft.com/office/drawing/2014/main" id="{125C68E9-8218-4342-8658-CF5C57CF3C2A}"/>
+              </a:ext>
+            </a:extLst>
+          </p:cNvPr>
           <p:cNvSpPr>
             <a:spLocks noGrp="1"/>
           </p:cNvSpPr>
@@ -332,7 +315,7 @@
           <a:bodyPr/>
           <a:lstStyle/>
           <a:p>
-            <a:fld id="{C1FF6DA9-008F-8B48-92A6-B652298478BF}" type="slidenum">
+            <a:fld id="{5F02EBD8-602C-4319-9146-7430882F2051}" type="slidenum">
               <a:rPr lang="en-US" smtClean="0"/>
               <a:t>‹#›</a:t>
             </a:fld>
@@ -343,7 +326,7 @@
     </p:spTree>
     <p:extLst>
       <p:ext uri="{BB962C8B-B14F-4D97-AF65-F5344CB8AC3E}">
-        <p14:creationId xmlns:p14="http://schemas.microsoft.com/office/powerpoint/2010/main" val="3168075583"/>
+        <p14:creationId xmlns:p14="http://schemas.microsoft.com/office/powerpoint/2010/main" val="3712534773"/>
       </p:ext>
     </p:extLst>
   </p:cSld>
@@ -372,7 +355,13 @@
       </p:grpSpPr>
       <p:sp>
         <p:nvSpPr>
-          <p:cNvPr id="2" name="Title 1"/>
+          <p:cNvPr id="2" name="Title 1">
+            <a:extLst>
+              <a:ext uri="{FF2B5EF4-FFF2-40B4-BE49-F238E27FC236}">
+                <a16:creationId xmlns:a16="http://schemas.microsoft.com/office/drawing/2014/main" id="{D4308635-B8D9-4789-B70F-3FB8B341357E}"/>
+              </a:ext>
+            </a:extLst>
+          </p:cNvPr>
           <p:cNvSpPr>
             <a:spLocks noGrp="1"/>
           </p:cNvSpPr>
@@ -386,83 +375,93 @@
           <a:lstStyle/>
           <a:p>
             <a:r>
+              <a:rPr lang="en-US"/>
+              <a:t>Click to edit Master title style</a:t>
+            </a:r>
+          </a:p>
+        </p:txBody>
+      </p:sp>
+      <p:sp>
+        <p:nvSpPr>
+          <p:cNvPr id="3" name="Vertical Text Placeholder 2">
+            <a:extLst>
+              <a:ext uri="{FF2B5EF4-FFF2-40B4-BE49-F238E27FC236}">
+                <a16:creationId xmlns:a16="http://schemas.microsoft.com/office/drawing/2014/main" id="{466B3E25-F603-4376-B372-46B3D16BE540}"/>
+              </a:ext>
+            </a:extLst>
+          </p:cNvPr>
+          <p:cNvSpPr>
+            <a:spLocks noGrp="1"/>
+          </p:cNvSpPr>
+          <p:nvPr>
+            <p:ph type="body" orient="vert" idx="1"/>
+          </p:nvPr>
+        </p:nvSpPr>
+        <p:spPr/>
+        <p:txBody>
+          <a:bodyPr vert="eaVert"/>
+          <a:lstStyle/>
+          <a:p>
+            <a:pPr lvl="0"/>
+            <a:r>
+              <a:rPr lang="en-US"/>
+              <a:t>Edit Master text styles</a:t>
+            </a:r>
+          </a:p>
+          <a:p>
+            <a:pPr lvl="1"/>
+            <a:r>
+              <a:rPr lang="en-US"/>
+              <a:t>Second level</a:t>
+            </a:r>
+          </a:p>
+          <a:p>
+            <a:pPr lvl="2"/>
+            <a:r>
+              <a:rPr lang="en-US"/>
+              <a:t>Third level</a:t>
+            </a:r>
+          </a:p>
+          <a:p>
+            <a:pPr lvl="3"/>
+            <a:r>
+              <a:rPr lang="en-US"/>
+              <a:t>Fourth level</a:t>
+            </a:r>
+          </a:p>
+          <a:p>
+            <a:pPr lvl="4"/>
+            <a:r>
+              <a:rPr lang="en-US"/>
+              <a:t>Fifth level</a:t>
+            </a:r>
+          </a:p>
+        </p:txBody>
+      </p:sp>
+      <p:sp>
+        <p:nvSpPr>
+          <p:cNvPr id="4" name="Date Placeholder 3">
+            <a:extLst>
+              <a:ext uri="{FF2B5EF4-FFF2-40B4-BE49-F238E27FC236}">
+                <a16:creationId xmlns:a16="http://schemas.microsoft.com/office/drawing/2014/main" id="{A48BC110-BC05-4D2F-B258-818D7F1C2F56}"/>
+              </a:ext>
+            </a:extLst>
+          </p:cNvPr>
+          <p:cNvSpPr>
+            <a:spLocks noGrp="1"/>
+          </p:cNvSpPr>
+          <p:nvPr>
+            <p:ph type="dt" sz="half" idx="10"/>
+          </p:nvPr>
+        </p:nvSpPr>
+        <p:spPr/>
+        <p:txBody>
+          <a:bodyPr/>
+          <a:lstStyle/>
+          <a:p>
+            <a:fld id="{B11CAE26-DC4B-40B0-AA71-79A794444606}" type="datetimeFigureOut">
               <a:rPr lang="en-US" smtClean="0"/>
-              <a:t>Click to edit Master title style</a:t>
-            </a:r>
-            <a:endParaRPr lang="en-US"/>
-          </a:p>
-        </p:txBody>
-      </p:sp>
-      <p:sp>
-        <p:nvSpPr>
-          <p:cNvPr id="3" name="Vertical Text Placeholder 2"/>
-          <p:cNvSpPr>
-            <a:spLocks noGrp="1"/>
-          </p:cNvSpPr>
-          <p:nvPr>
-            <p:ph type="body" orient="vert" idx="1"/>
-          </p:nvPr>
-        </p:nvSpPr>
-        <p:spPr/>
-        <p:txBody>
-          <a:bodyPr vert="eaVert"/>
-          <a:lstStyle/>
-          <a:p>
-            <a:pPr lvl="0"/>
-            <a:r>
-              <a:rPr lang="en-US" smtClean="0"/>
-              <a:t>Click to edit Master text styles</a:t>
-            </a:r>
-          </a:p>
-          <a:p>
-            <a:pPr lvl="1"/>
-            <a:r>
-              <a:rPr lang="en-US" smtClean="0"/>
-              <a:t>Second level</a:t>
-            </a:r>
-          </a:p>
-          <a:p>
-            <a:pPr lvl="2"/>
-            <a:r>
-              <a:rPr lang="en-US" smtClean="0"/>
-              <a:t>Third level</a:t>
-            </a:r>
-          </a:p>
-          <a:p>
-            <a:pPr lvl="3"/>
-            <a:r>
-              <a:rPr lang="en-US" smtClean="0"/>
-              <a:t>Fourth level</a:t>
-            </a:r>
-          </a:p>
-          <a:p>
-            <a:pPr lvl="4"/>
-            <a:r>
-              <a:rPr lang="en-US" smtClean="0"/>
-              <a:t>Fifth level</a:t>
-            </a:r>
-            <a:endParaRPr lang="en-US"/>
-          </a:p>
-        </p:txBody>
-      </p:sp>
-      <p:sp>
-        <p:nvSpPr>
-          <p:cNvPr id="4" name="Date Placeholder 3"/>
-          <p:cNvSpPr>
-            <a:spLocks noGrp="1"/>
-          </p:cNvSpPr>
-          <p:nvPr>
-            <p:ph type="dt" sz="half" idx="10"/>
-          </p:nvPr>
-        </p:nvSpPr>
-        <p:spPr/>
-        <p:txBody>
-          <a:bodyPr/>
-          <a:lstStyle/>
-          <a:p>
-            <a:fld id="{5BCAD085-E8A6-8845-BD4E-CB4CCA059FC4}" type="datetimeFigureOut">
-              <a:rPr lang="en-US" smtClean="0"/>
-              <a:t>1/27/13</a:t>
+              <a:t>3/2/2018</a:t>
             </a:fld>
             <a:endParaRPr lang="en-US"/>
           </a:p>
@@ -470,7 +469,13 @@
       </p:sp>
       <p:sp>
         <p:nvSpPr>
-          <p:cNvPr id="5" name="Footer Placeholder 4"/>
+          <p:cNvPr id="5" name="Footer Placeholder 4">
+            <a:extLst>
+              <a:ext uri="{FF2B5EF4-FFF2-40B4-BE49-F238E27FC236}">
+                <a16:creationId xmlns:a16="http://schemas.microsoft.com/office/drawing/2014/main" id="{7C5195FE-63E8-4460-8313-15F22CF97DF4}"/>
+              </a:ext>
+            </a:extLst>
+          </p:cNvPr>
           <p:cNvSpPr>
             <a:spLocks noGrp="1"/>
           </p:cNvSpPr>
@@ -489,7 +494,13 @@
       </p:sp>
       <p:sp>
         <p:nvSpPr>
-          <p:cNvPr id="6" name="Slide Number Placeholder 5"/>
+          <p:cNvPr id="6" name="Slide Number Placeholder 5">
+            <a:extLst>
+              <a:ext uri="{FF2B5EF4-FFF2-40B4-BE49-F238E27FC236}">
+                <a16:creationId xmlns:a16="http://schemas.microsoft.com/office/drawing/2014/main" id="{B06D63D2-63D1-486D-AC94-F37B4876D2B0}"/>
+              </a:ext>
+            </a:extLst>
+          </p:cNvPr>
           <p:cNvSpPr>
             <a:spLocks noGrp="1"/>
           </p:cNvSpPr>
@@ -502,7 +513,7 @@
           <a:bodyPr/>
           <a:lstStyle/>
           <a:p>
-            <a:fld id="{C1FF6DA9-008F-8B48-92A6-B652298478BF}" type="slidenum">
+            <a:fld id="{5F02EBD8-602C-4319-9146-7430882F2051}" type="slidenum">
               <a:rPr lang="en-US" smtClean="0"/>
               <a:t>‹#›</a:t>
             </a:fld>
@@ -513,7 +524,7 @@
     </p:spTree>
     <p:extLst>
       <p:ext uri="{BB962C8B-B14F-4D97-AF65-F5344CB8AC3E}">
-        <p14:creationId xmlns:p14="http://schemas.microsoft.com/office/powerpoint/2010/main" val="2910927964"/>
+        <p14:creationId xmlns:p14="http://schemas.microsoft.com/office/powerpoint/2010/main" val="3666343009"/>
       </p:ext>
     </p:extLst>
   </p:cSld>
@@ -542,7 +553,13 @@
       </p:grpSpPr>
       <p:sp>
         <p:nvSpPr>
-          <p:cNvPr id="2" name="Vertical Title 1"/>
+          <p:cNvPr id="2" name="Vertical Title 1">
+            <a:extLst>
+              <a:ext uri="{FF2B5EF4-FFF2-40B4-BE49-F238E27FC236}">
+                <a16:creationId xmlns:a16="http://schemas.microsoft.com/office/drawing/2014/main" id="{00BECAA6-F8F8-454B-8569-923A07C760E0}"/>
+              </a:ext>
+            </a:extLst>
+          </p:cNvPr>
           <p:cNvSpPr>
             <a:spLocks noGrp="1"/>
           </p:cNvSpPr>
@@ -552,8 +569,8 @@
         </p:nvSpPr>
         <p:spPr>
           <a:xfrm>
-            <a:off x="6629400" y="274638"/>
-            <a:ext cx="2057400" cy="5851525"/>
+            <a:off x="8724900" y="365125"/>
+            <a:ext cx="2628900" cy="5811838"/>
           </a:xfrm>
         </p:spPr>
         <p:txBody>
@@ -561,16 +578,21 @@
           <a:lstStyle/>
           <a:p>
             <a:r>
-              <a:rPr lang="en-US" smtClean="0"/>
+              <a:rPr lang="en-US"/>
               <a:t>Click to edit Master title style</a:t>
             </a:r>
-            <a:endParaRPr lang="en-US"/>
-          </a:p>
-        </p:txBody>
-      </p:sp>
-      <p:sp>
-        <p:nvSpPr>
-          <p:cNvPr id="3" name="Vertical Text Placeholder 2"/>
+          </a:p>
+        </p:txBody>
+      </p:sp>
+      <p:sp>
+        <p:nvSpPr>
+          <p:cNvPr id="3" name="Vertical Text Placeholder 2">
+            <a:extLst>
+              <a:ext uri="{FF2B5EF4-FFF2-40B4-BE49-F238E27FC236}">
+                <a16:creationId xmlns:a16="http://schemas.microsoft.com/office/drawing/2014/main" id="{15217C50-4FAF-488E-BE14-6739CE06C541}"/>
+              </a:ext>
+            </a:extLst>
+          </p:cNvPr>
           <p:cNvSpPr>
             <a:spLocks noGrp="1"/>
           </p:cNvSpPr>
@@ -580,8 +602,8 @@
         </p:nvSpPr>
         <p:spPr>
           <a:xfrm>
-            <a:off x="457200" y="274638"/>
-            <a:ext cx="6019800" cy="5851525"/>
+            <a:off x="838200" y="365125"/>
+            <a:ext cx="7734300" cy="5811838"/>
           </a:xfrm>
         </p:spPr>
         <p:txBody>
@@ -590,59 +612,64 @@
           <a:p>
             <a:pPr lvl="0"/>
             <a:r>
+              <a:rPr lang="en-US"/>
+              <a:t>Edit Master text styles</a:t>
+            </a:r>
+          </a:p>
+          <a:p>
+            <a:pPr lvl="1"/>
+            <a:r>
+              <a:rPr lang="en-US"/>
+              <a:t>Second level</a:t>
+            </a:r>
+          </a:p>
+          <a:p>
+            <a:pPr lvl="2"/>
+            <a:r>
+              <a:rPr lang="en-US"/>
+              <a:t>Third level</a:t>
+            </a:r>
+          </a:p>
+          <a:p>
+            <a:pPr lvl="3"/>
+            <a:r>
+              <a:rPr lang="en-US"/>
+              <a:t>Fourth level</a:t>
+            </a:r>
+          </a:p>
+          <a:p>
+            <a:pPr lvl="4"/>
+            <a:r>
+              <a:rPr lang="en-US"/>
+              <a:t>Fifth level</a:t>
+            </a:r>
+          </a:p>
+        </p:txBody>
+      </p:sp>
+      <p:sp>
+        <p:nvSpPr>
+          <p:cNvPr id="4" name="Date Placeholder 3">
+            <a:extLst>
+              <a:ext uri="{FF2B5EF4-FFF2-40B4-BE49-F238E27FC236}">
+                <a16:creationId xmlns:a16="http://schemas.microsoft.com/office/drawing/2014/main" id="{BE8F07FE-7B25-47F4-BDC1-16F734AA2002}"/>
+              </a:ext>
+            </a:extLst>
+          </p:cNvPr>
+          <p:cNvSpPr>
+            <a:spLocks noGrp="1"/>
+          </p:cNvSpPr>
+          <p:nvPr>
+            <p:ph type="dt" sz="half" idx="10"/>
+          </p:nvPr>
+        </p:nvSpPr>
+        <p:spPr/>
+        <p:txBody>
+          <a:bodyPr/>
+          <a:lstStyle/>
+          <a:p>
+            <a:fld id="{B11CAE26-DC4B-40B0-AA71-79A794444606}" type="datetimeFigureOut">
               <a:rPr lang="en-US" smtClean="0"/>
-              <a:t>Click to edit Master text styles</a:t>
-            </a:r>
-          </a:p>
-          <a:p>
-            <a:pPr lvl="1"/>
-            <a:r>
-              <a:rPr lang="en-US" smtClean="0"/>
-              <a:t>Second level</a:t>
-            </a:r>
-          </a:p>
-          <a:p>
-            <a:pPr lvl="2"/>
-            <a:r>
-              <a:rPr lang="en-US" smtClean="0"/>
-              <a:t>Third level</a:t>
-            </a:r>
-          </a:p>
-          <a:p>
-            <a:pPr lvl="3"/>
-            <a:r>
-              <a:rPr lang="en-US" smtClean="0"/>
-              <a:t>Fourth level</a:t>
-            </a:r>
-          </a:p>
-          <a:p>
-            <a:pPr lvl="4"/>
-            <a:r>
-              <a:rPr lang="en-US" smtClean="0"/>
-              <a:t>Fifth level</a:t>
-            </a:r>
-            <a:endParaRPr lang="en-US"/>
-          </a:p>
-        </p:txBody>
-      </p:sp>
-      <p:sp>
-        <p:nvSpPr>
-          <p:cNvPr id="4" name="Date Placeholder 3"/>
-          <p:cNvSpPr>
-            <a:spLocks noGrp="1"/>
-          </p:cNvSpPr>
-          <p:nvPr>
-            <p:ph type="dt" sz="half" idx="10"/>
-          </p:nvPr>
-        </p:nvSpPr>
-        <p:spPr/>
-        <p:txBody>
-          <a:bodyPr/>
-          <a:lstStyle/>
-          <a:p>
-            <a:fld id="{5BCAD085-E8A6-8845-BD4E-CB4CCA059FC4}" type="datetimeFigureOut">
-              <a:rPr lang="en-US" smtClean="0"/>
-              <a:t>1/27/13</a:t>
+              <a:t>3/2/2018</a:t>
             </a:fld>
             <a:endParaRPr lang="en-US"/>
           </a:p>
@@ -650,7 +677,13 @@
       </p:sp>
       <p:sp>
         <p:nvSpPr>
-          <p:cNvPr id="5" name="Footer Placeholder 4"/>
+          <p:cNvPr id="5" name="Footer Placeholder 4">
+            <a:extLst>
+              <a:ext uri="{FF2B5EF4-FFF2-40B4-BE49-F238E27FC236}">
+                <a16:creationId xmlns:a16="http://schemas.microsoft.com/office/drawing/2014/main" id="{D911FC4B-49FE-48C1-9E3F-4120C82D22A2}"/>
+              </a:ext>
+            </a:extLst>
+          </p:cNvPr>
           <p:cNvSpPr>
             <a:spLocks noGrp="1"/>
           </p:cNvSpPr>
@@ -669,7 +702,13 @@
       </p:sp>
       <p:sp>
         <p:nvSpPr>
-          <p:cNvPr id="6" name="Slide Number Placeholder 5"/>
+          <p:cNvPr id="6" name="Slide Number Placeholder 5">
+            <a:extLst>
+              <a:ext uri="{FF2B5EF4-FFF2-40B4-BE49-F238E27FC236}">
+                <a16:creationId xmlns:a16="http://schemas.microsoft.com/office/drawing/2014/main" id="{B17E9EAA-AF73-4E45-9D3B-DC97CC7B3415}"/>
+              </a:ext>
+            </a:extLst>
+          </p:cNvPr>
           <p:cNvSpPr>
             <a:spLocks noGrp="1"/>
           </p:cNvSpPr>
@@ -682,7 +721,7 @@
           <a:bodyPr/>
           <a:lstStyle/>
           <a:p>
-            <a:fld id="{C1FF6DA9-008F-8B48-92A6-B652298478BF}" type="slidenum">
+            <a:fld id="{5F02EBD8-602C-4319-9146-7430882F2051}" type="slidenum">
               <a:rPr lang="en-US" smtClean="0"/>
               <a:t>‹#›</a:t>
             </a:fld>
@@ -693,7 +732,7 @@
     </p:spTree>
     <p:extLst>
       <p:ext uri="{BB962C8B-B14F-4D97-AF65-F5344CB8AC3E}">
-        <p14:creationId xmlns:p14="http://schemas.microsoft.com/office/powerpoint/2010/main" val="3612223792"/>
+        <p14:creationId xmlns:p14="http://schemas.microsoft.com/office/powerpoint/2010/main" val="4233460928"/>
       </p:ext>
     </p:extLst>
   </p:cSld>
@@ -722,7 +761,13 @@
       </p:grpSpPr>
       <p:sp>
         <p:nvSpPr>
-          <p:cNvPr id="2" name="Title 1"/>
+          <p:cNvPr id="2" name="Title 1">
+            <a:extLst>
+              <a:ext uri="{FF2B5EF4-FFF2-40B4-BE49-F238E27FC236}">
+                <a16:creationId xmlns:a16="http://schemas.microsoft.com/office/drawing/2014/main" id="{D9361C40-0A06-4E12-93CF-65D15ABDB4DA}"/>
+              </a:ext>
+            </a:extLst>
+          </p:cNvPr>
           <p:cNvSpPr>
             <a:spLocks noGrp="1"/>
           </p:cNvSpPr>
@@ -736,83 +781,93 @@
           <a:lstStyle/>
           <a:p>
             <a:r>
+              <a:rPr lang="en-US"/>
+              <a:t>Click to edit Master title style</a:t>
+            </a:r>
+          </a:p>
+        </p:txBody>
+      </p:sp>
+      <p:sp>
+        <p:nvSpPr>
+          <p:cNvPr id="3" name="Content Placeholder 2">
+            <a:extLst>
+              <a:ext uri="{FF2B5EF4-FFF2-40B4-BE49-F238E27FC236}">
+                <a16:creationId xmlns:a16="http://schemas.microsoft.com/office/drawing/2014/main" id="{7D55FF67-6E16-4253-A614-22FB8D694421}"/>
+              </a:ext>
+            </a:extLst>
+          </p:cNvPr>
+          <p:cNvSpPr>
+            <a:spLocks noGrp="1"/>
+          </p:cNvSpPr>
+          <p:nvPr>
+            <p:ph idx="1"/>
+          </p:nvPr>
+        </p:nvSpPr>
+        <p:spPr/>
+        <p:txBody>
+          <a:bodyPr/>
+          <a:lstStyle/>
+          <a:p>
+            <a:pPr lvl="0"/>
+            <a:r>
+              <a:rPr lang="en-US"/>
+              <a:t>Edit Master text styles</a:t>
+            </a:r>
+          </a:p>
+          <a:p>
+            <a:pPr lvl="1"/>
+            <a:r>
+              <a:rPr lang="en-US"/>
+              <a:t>Second level</a:t>
+            </a:r>
+          </a:p>
+          <a:p>
+            <a:pPr lvl="2"/>
+            <a:r>
+              <a:rPr lang="en-US"/>
+              <a:t>Third level</a:t>
+            </a:r>
+          </a:p>
+          <a:p>
+            <a:pPr lvl="3"/>
+            <a:r>
+              <a:rPr lang="en-US"/>
+              <a:t>Fourth level</a:t>
+            </a:r>
+          </a:p>
+          <a:p>
+            <a:pPr lvl="4"/>
+            <a:r>
+              <a:rPr lang="en-US"/>
+              <a:t>Fifth level</a:t>
+            </a:r>
+          </a:p>
+        </p:txBody>
+      </p:sp>
+      <p:sp>
+        <p:nvSpPr>
+          <p:cNvPr id="4" name="Date Placeholder 3">
+            <a:extLst>
+              <a:ext uri="{FF2B5EF4-FFF2-40B4-BE49-F238E27FC236}">
+                <a16:creationId xmlns:a16="http://schemas.microsoft.com/office/drawing/2014/main" id="{18EBFFEC-C620-40EA-B9FF-DC96BAF5B417}"/>
+              </a:ext>
+            </a:extLst>
+          </p:cNvPr>
+          <p:cNvSpPr>
+            <a:spLocks noGrp="1"/>
+          </p:cNvSpPr>
+          <p:nvPr>
+            <p:ph type="dt" sz="half" idx="10"/>
+          </p:nvPr>
+        </p:nvSpPr>
+        <p:spPr/>
+        <p:txBody>
+          <a:bodyPr/>
+          <a:lstStyle/>
+          <a:p>
+            <a:fld id="{B11CAE26-DC4B-40B0-AA71-79A794444606}" type="datetimeFigureOut">
               <a:rPr lang="en-US" smtClean="0"/>
-              <a:t>Click to edit Master title style</a:t>
-            </a:r>
-            <a:endParaRPr lang="en-US"/>
-          </a:p>
-        </p:txBody>
-      </p:sp>
-      <p:sp>
-        <p:nvSpPr>
-          <p:cNvPr id="3" name="Content Placeholder 2"/>
-          <p:cNvSpPr>
-            <a:spLocks noGrp="1"/>
-          </p:cNvSpPr>
-          <p:nvPr>
-            <p:ph idx="1"/>
-          </p:nvPr>
-        </p:nvSpPr>
-        <p:spPr/>
-        <p:txBody>
-          <a:bodyPr/>
-          <a:lstStyle/>
-          <a:p>
-            <a:pPr lvl="0"/>
-            <a:r>
-              <a:rPr lang="en-US" smtClean="0"/>
-              <a:t>Click to edit Master text styles</a:t>
-            </a:r>
-          </a:p>
-          <a:p>
-            <a:pPr lvl="1"/>
-            <a:r>
-              <a:rPr lang="en-US" smtClean="0"/>
-              <a:t>Second level</a:t>
-            </a:r>
-          </a:p>
-          <a:p>
-            <a:pPr lvl="2"/>
-            <a:r>
-              <a:rPr lang="en-US" smtClean="0"/>
-              <a:t>Third level</a:t>
-            </a:r>
-          </a:p>
-          <a:p>
-            <a:pPr lvl="3"/>
-            <a:r>
-              <a:rPr lang="en-US" smtClean="0"/>
-              <a:t>Fourth level</a:t>
-            </a:r>
-          </a:p>
-          <a:p>
-            <a:pPr lvl="4"/>
-            <a:r>
-              <a:rPr lang="en-US" smtClean="0"/>
-              <a:t>Fifth level</a:t>
-            </a:r>
-            <a:endParaRPr lang="en-US"/>
-          </a:p>
-        </p:txBody>
-      </p:sp>
-      <p:sp>
-        <p:nvSpPr>
-          <p:cNvPr id="4" name="Date Placeholder 3"/>
-          <p:cNvSpPr>
-            <a:spLocks noGrp="1"/>
-          </p:cNvSpPr>
-          <p:nvPr>
-            <p:ph type="dt" sz="half" idx="10"/>
-          </p:nvPr>
-        </p:nvSpPr>
-        <p:spPr/>
-        <p:txBody>
-          <a:bodyPr/>
-          <a:lstStyle/>
-          <a:p>
-            <a:fld id="{5BCAD085-E8A6-8845-BD4E-CB4CCA059FC4}" type="datetimeFigureOut">
-              <a:rPr lang="en-US" smtClean="0"/>
-              <a:t>1/27/13</a:t>
+              <a:t>3/2/2018</a:t>
             </a:fld>
             <a:endParaRPr lang="en-US"/>
           </a:p>
@@ -820,7 +875,13 @@
       </p:sp>
       <p:sp>
         <p:nvSpPr>
-          <p:cNvPr id="5" name="Footer Placeholder 4"/>
+          <p:cNvPr id="5" name="Footer Placeholder 4">
+            <a:extLst>
+              <a:ext uri="{FF2B5EF4-FFF2-40B4-BE49-F238E27FC236}">
+                <a16:creationId xmlns:a16="http://schemas.microsoft.com/office/drawing/2014/main" id="{D556E35B-F899-4E95-BCA3-C42C20ABCB45}"/>
+              </a:ext>
+            </a:extLst>
+          </p:cNvPr>
           <p:cNvSpPr>
             <a:spLocks noGrp="1"/>
           </p:cNvSpPr>
@@ -839,7 +900,13 @@
       </p:sp>
       <p:sp>
         <p:nvSpPr>
-          <p:cNvPr id="6" name="Slide Number Placeholder 5"/>
+          <p:cNvPr id="6" name="Slide Number Placeholder 5">
+            <a:extLst>
+              <a:ext uri="{FF2B5EF4-FFF2-40B4-BE49-F238E27FC236}">
+                <a16:creationId xmlns:a16="http://schemas.microsoft.com/office/drawing/2014/main" id="{384D6B20-8048-4DF7-AACA-F8C5C0BB3571}"/>
+              </a:ext>
+            </a:extLst>
+          </p:cNvPr>
           <p:cNvSpPr>
             <a:spLocks noGrp="1"/>
           </p:cNvSpPr>
@@ -852,7 +919,7 @@
           <a:bodyPr/>
           <a:lstStyle/>
           <a:p>
-            <a:fld id="{C1FF6DA9-008F-8B48-92A6-B652298478BF}" type="slidenum">
+            <a:fld id="{5F02EBD8-602C-4319-9146-7430882F2051}" type="slidenum">
               <a:rPr lang="en-US" smtClean="0"/>
               <a:t>‹#›</a:t>
             </a:fld>
@@ -863,7 +930,7 @@
     </p:spTree>
     <p:extLst>
       <p:ext uri="{BB962C8B-B14F-4D97-AF65-F5344CB8AC3E}">
-        <p14:creationId xmlns:p14="http://schemas.microsoft.com/office/powerpoint/2010/main" val="2614314258"/>
+        <p14:creationId xmlns:p14="http://schemas.microsoft.com/office/powerpoint/2010/main" val="167117269"/>
       </p:ext>
     </p:extLst>
   </p:cSld>
@@ -892,7 +959,13 @@
       </p:grpSpPr>
       <p:sp>
         <p:nvSpPr>
-          <p:cNvPr id="2" name="Title 1"/>
+          <p:cNvPr id="2" name="Title 1">
+            <a:extLst>
+              <a:ext uri="{FF2B5EF4-FFF2-40B4-BE49-F238E27FC236}">
+                <a16:creationId xmlns:a16="http://schemas.microsoft.com/office/drawing/2014/main" id="{A665B437-7309-4832-A8E9-F6ED4F62DB3E}"/>
+              </a:ext>
+            </a:extLst>
+          </p:cNvPr>
           <p:cNvSpPr>
             <a:spLocks noGrp="1"/>
           </p:cNvSpPr>
@@ -902,29 +975,34 @@
         </p:nvSpPr>
         <p:spPr>
           <a:xfrm>
-            <a:off x="722313" y="4406900"/>
-            <a:ext cx="7772400" cy="1362075"/>
+            <a:off x="831850" y="1709738"/>
+            <a:ext cx="10515600" cy="2852737"/>
           </a:xfrm>
         </p:spPr>
         <p:txBody>
-          <a:bodyPr anchor="t"/>
+          <a:bodyPr anchor="b"/>
           <a:lstStyle>
-            <a:lvl1pPr algn="l">
-              <a:defRPr sz="4000" b="1" cap="all"/>
+            <a:lvl1pPr>
+              <a:defRPr sz="6000"/>
             </a:lvl1pPr>
           </a:lstStyle>
           <a:p>
             <a:r>
-              <a:rPr lang="en-US" smtClean="0"/>
+              <a:rPr lang="en-US"/>
               <a:t>Click to edit Master title style</a:t>
             </a:r>
-            <a:endParaRPr lang="en-US"/>
-          </a:p>
-        </p:txBody>
-      </p:sp>
-      <p:sp>
-        <p:nvSpPr>
-          <p:cNvPr id="3" name="Text Placeholder 2"/>
+          </a:p>
+        </p:txBody>
+      </p:sp>
+      <p:sp>
+        <p:nvSpPr>
+          <p:cNvPr id="3" name="Text Placeholder 2">
+            <a:extLst>
+              <a:ext uri="{FF2B5EF4-FFF2-40B4-BE49-F238E27FC236}">
+                <a16:creationId xmlns:a16="http://schemas.microsoft.com/office/drawing/2014/main" id="{AE8804D5-29F6-41B4-A48F-3740140E0EF8}"/>
+              </a:ext>
+            </a:extLst>
+          </p:cNvPr>
           <p:cNvSpPr>
             <a:spLocks noGrp="1"/>
           </p:cNvSpPr>
@@ -934,16 +1012,16 @@
         </p:nvSpPr>
         <p:spPr>
           <a:xfrm>
-            <a:off x="722313" y="2906713"/>
-            <a:ext cx="7772400" cy="1500187"/>
+            <a:off x="831850" y="4589463"/>
+            <a:ext cx="10515600" cy="1500187"/>
           </a:xfrm>
         </p:spPr>
         <p:txBody>
-          <a:bodyPr anchor="b"/>
+          <a:bodyPr/>
           <a:lstStyle>
             <a:lvl1pPr marL="0" indent="0">
               <a:buNone/>
-              <a:defRPr sz="2000">
+              <a:defRPr sz="2400">
                 <a:solidFill>
                   <a:schemeClr val="tx1">
                     <a:tint val="75000"/>
@@ -953,7 +1031,7 @@
             </a:lvl1pPr>
             <a:lvl2pPr marL="457200" indent="0">
               <a:buNone/>
-              <a:defRPr sz="1800">
+              <a:defRPr sz="2000">
                 <a:solidFill>
                   <a:schemeClr val="tx1">
                     <a:tint val="75000"/>
@@ -963,7 +1041,7 @@
             </a:lvl2pPr>
             <a:lvl3pPr marL="914400" indent="0">
               <a:buNone/>
-              <a:defRPr sz="1600">
+              <a:defRPr sz="1800">
                 <a:solidFill>
                   <a:schemeClr val="tx1">
                     <a:tint val="75000"/>
@@ -973,7 +1051,7 @@
             </a:lvl3pPr>
             <a:lvl4pPr marL="1371600" indent="0">
               <a:buNone/>
-              <a:defRPr sz="1400">
+              <a:defRPr sz="1600">
                 <a:solidFill>
                   <a:schemeClr val="tx1">
                     <a:tint val="75000"/>
@@ -983,7 +1061,7 @@
             </a:lvl4pPr>
             <a:lvl5pPr marL="1828800" indent="0">
               <a:buNone/>
-              <a:defRPr sz="1400">
+              <a:defRPr sz="1600">
                 <a:solidFill>
                   <a:schemeClr val="tx1">
                     <a:tint val="75000"/>
@@ -993,7 +1071,7 @@
             </a:lvl5pPr>
             <a:lvl6pPr marL="2286000" indent="0">
               <a:buNone/>
-              <a:defRPr sz="1400">
+              <a:defRPr sz="1600">
                 <a:solidFill>
                   <a:schemeClr val="tx1">
                     <a:tint val="75000"/>
@@ -1003,7 +1081,7 @@
             </a:lvl6pPr>
             <a:lvl7pPr marL="2743200" indent="0">
               <a:buNone/>
-              <a:defRPr sz="1400">
+              <a:defRPr sz="1600">
                 <a:solidFill>
                   <a:schemeClr val="tx1">
                     <a:tint val="75000"/>
@@ -1013,7 +1091,7 @@
             </a:lvl7pPr>
             <a:lvl8pPr marL="3200400" indent="0">
               <a:buNone/>
-              <a:defRPr sz="1400">
+              <a:defRPr sz="1600">
                 <a:solidFill>
                   <a:schemeClr val="tx1">
                     <a:tint val="75000"/>
@@ -1023,7 +1101,7 @@
             </a:lvl8pPr>
             <a:lvl9pPr marL="3657600" indent="0">
               <a:buNone/>
-              <a:defRPr sz="1400">
+              <a:defRPr sz="1600">
                 <a:solidFill>
                   <a:schemeClr val="tx1">
                     <a:tint val="75000"/>
@@ -1035,30 +1113,36 @@
           <a:p>
             <a:pPr lvl="0"/>
             <a:r>
+              <a:rPr lang="en-US"/>
+              <a:t>Edit Master text styles</a:t>
+            </a:r>
+          </a:p>
+        </p:txBody>
+      </p:sp>
+      <p:sp>
+        <p:nvSpPr>
+          <p:cNvPr id="4" name="Date Placeholder 3">
+            <a:extLst>
+              <a:ext uri="{FF2B5EF4-FFF2-40B4-BE49-F238E27FC236}">
+                <a16:creationId xmlns:a16="http://schemas.microsoft.com/office/drawing/2014/main" id="{281F8C8C-C6E3-4F86-B308-B35B0BB19B68}"/>
+              </a:ext>
+            </a:extLst>
+          </p:cNvPr>
+          <p:cNvSpPr>
+            <a:spLocks noGrp="1"/>
+          </p:cNvSpPr>
+          <p:nvPr>
+            <p:ph type="dt" sz="half" idx="10"/>
+          </p:nvPr>
+        </p:nvSpPr>
+        <p:spPr/>
+        <p:txBody>
+          <a:bodyPr/>
+          <a:lstStyle/>
+          <a:p>
+            <a:fld id="{B11CAE26-DC4B-40B0-AA71-79A794444606}" type="datetimeFigureOut">
               <a:rPr lang="en-US" smtClean="0"/>
-              <a:t>Click to edit Master text styles</a:t>
-            </a:r>
-          </a:p>
-        </p:txBody>
-      </p:sp>
-      <p:sp>
-        <p:nvSpPr>
-          <p:cNvPr id="4" name="Date Placeholder 3"/>
-          <p:cNvSpPr>
-            <a:spLocks noGrp="1"/>
-          </p:cNvSpPr>
-          <p:nvPr>
-            <p:ph type="dt" sz="half" idx="10"/>
-          </p:nvPr>
-        </p:nvSpPr>
-        <p:spPr/>
-        <p:txBody>
-          <a:bodyPr/>
-          <a:lstStyle/>
-          <a:p>
-            <a:fld id="{5BCAD085-E8A6-8845-BD4E-CB4CCA059FC4}" type="datetimeFigureOut">
-              <a:rPr lang="en-US" smtClean="0"/>
-              <a:t>1/27/13</a:t>
+              <a:t>3/2/2018</a:t>
             </a:fld>
             <a:endParaRPr lang="en-US"/>
           </a:p>
@@ -1066,7 +1150,13 @@
       </p:sp>
       <p:sp>
         <p:nvSpPr>
-          <p:cNvPr id="5" name="Footer Placeholder 4"/>
+          <p:cNvPr id="5" name="Footer Placeholder 4">
+            <a:extLst>
+              <a:ext uri="{FF2B5EF4-FFF2-40B4-BE49-F238E27FC236}">
+                <a16:creationId xmlns:a16="http://schemas.microsoft.com/office/drawing/2014/main" id="{ECF5EBD6-ED01-4707-BF93-87D3FBB917FF}"/>
+              </a:ext>
+            </a:extLst>
+          </p:cNvPr>
           <p:cNvSpPr>
             <a:spLocks noGrp="1"/>
           </p:cNvSpPr>
@@ -1085,7 +1175,13 @@
       </p:sp>
       <p:sp>
         <p:nvSpPr>
-          <p:cNvPr id="6" name="Slide Number Placeholder 5"/>
+          <p:cNvPr id="6" name="Slide Number Placeholder 5">
+            <a:extLst>
+              <a:ext uri="{FF2B5EF4-FFF2-40B4-BE49-F238E27FC236}">
+                <a16:creationId xmlns:a16="http://schemas.microsoft.com/office/drawing/2014/main" id="{5EFA9520-DA46-4E55-91C0-CE6C46BE21EC}"/>
+              </a:ext>
+            </a:extLst>
+          </p:cNvPr>
           <p:cNvSpPr>
             <a:spLocks noGrp="1"/>
           </p:cNvSpPr>
@@ -1098,7 +1194,7 @@
           <a:bodyPr/>
           <a:lstStyle/>
           <a:p>
-            <a:fld id="{C1FF6DA9-008F-8B48-92A6-B652298478BF}" type="slidenum">
+            <a:fld id="{5F02EBD8-602C-4319-9146-7430882F2051}" type="slidenum">
               <a:rPr lang="en-US" smtClean="0"/>
               <a:t>‹#›</a:t>
             </a:fld>
@@ -1109,7 +1205,7 @@
     </p:spTree>
     <p:extLst>
       <p:ext uri="{BB962C8B-B14F-4D97-AF65-F5344CB8AC3E}">
-        <p14:creationId xmlns:p14="http://schemas.microsoft.com/office/powerpoint/2010/main" val="960648375"/>
+        <p14:creationId xmlns:p14="http://schemas.microsoft.com/office/powerpoint/2010/main" val="982184221"/>
       </p:ext>
     </p:extLst>
   </p:cSld>
@@ -1138,7 +1234,13 @@
       </p:grpSpPr>
       <p:sp>
         <p:nvSpPr>
-          <p:cNvPr id="2" name="Title 1"/>
+          <p:cNvPr id="2" name="Title 1">
+            <a:extLst>
+              <a:ext uri="{FF2B5EF4-FFF2-40B4-BE49-F238E27FC236}">
+                <a16:creationId xmlns:a16="http://schemas.microsoft.com/office/drawing/2014/main" id="{EE21F9DA-DB97-476A-833E-524AFAC7E7D9}"/>
+              </a:ext>
+            </a:extLst>
+          </p:cNvPr>
           <p:cNvSpPr>
             <a:spLocks noGrp="1"/>
           </p:cNvSpPr>
@@ -1152,16 +1254,21 @@
           <a:lstStyle/>
           <a:p>
             <a:r>
-              <a:rPr lang="en-US" smtClean="0"/>
+              <a:rPr lang="en-US"/>
               <a:t>Click to edit Master title style</a:t>
             </a:r>
-            <a:endParaRPr lang="en-US"/>
-          </a:p>
-        </p:txBody>
-      </p:sp>
-      <p:sp>
-        <p:nvSpPr>
-          <p:cNvPr id="3" name="Content Placeholder 2"/>
+          </a:p>
+        </p:txBody>
+      </p:sp>
+      <p:sp>
+        <p:nvSpPr>
+          <p:cNvPr id="3" name="Content Placeholder 2">
+            <a:extLst>
+              <a:ext uri="{FF2B5EF4-FFF2-40B4-BE49-F238E27FC236}">
+                <a16:creationId xmlns:a16="http://schemas.microsoft.com/office/drawing/2014/main" id="{ED06E383-9B5B-47E1-A5DA-CA156DB05888}"/>
+              </a:ext>
+            </a:extLst>
+          </p:cNvPr>
           <p:cNvSpPr>
             <a:spLocks noGrp="1"/>
           </p:cNvSpPr>
@@ -1171,82 +1278,59 @@
         </p:nvSpPr>
         <p:spPr>
           <a:xfrm>
-            <a:off x="457200" y="1600200"/>
-            <a:ext cx="4038600" cy="4525963"/>
+            <a:off x="838200" y="1825625"/>
+            <a:ext cx="5181600" cy="4351338"/>
           </a:xfrm>
         </p:spPr>
         <p:txBody>
           <a:bodyPr/>
-          <a:lstStyle>
-            <a:lvl1pPr>
-              <a:defRPr sz="2800"/>
-            </a:lvl1pPr>
-            <a:lvl2pPr>
-              <a:defRPr sz="2400"/>
-            </a:lvl2pPr>
-            <a:lvl3pPr>
-              <a:defRPr sz="2000"/>
-            </a:lvl3pPr>
-            <a:lvl4pPr>
-              <a:defRPr sz="1800"/>
-            </a:lvl4pPr>
-            <a:lvl5pPr>
-              <a:defRPr sz="1800"/>
-            </a:lvl5pPr>
-            <a:lvl6pPr>
-              <a:defRPr sz="1800"/>
-            </a:lvl6pPr>
-            <a:lvl7pPr>
-              <a:defRPr sz="1800"/>
-            </a:lvl7pPr>
-            <a:lvl8pPr>
-              <a:defRPr sz="1800"/>
-            </a:lvl8pPr>
-            <a:lvl9pPr>
-              <a:defRPr sz="1800"/>
-            </a:lvl9pPr>
-          </a:lstStyle>
+          <a:lstStyle/>
           <a:p>
             <a:pPr lvl="0"/>
             <a:r>
-              <a:rPr lang="en-US" smtClean="0"/>
-              <a:t>Click to edit Master text styles</a:t>
+              <a:rPr lang="en-US"/>
+              <a:t>Edit Master text styles</a:t>
             </a:r>
           </a:p>
           <a:p>
             <a:pPr lvl="1"/>
             <a:r>
-              <a:rPr lang="en-US" smtClean="0"/>
+              <a:rPr lang="en-US"/>
               <a:t>Second level</a:t>
             </a:r>
           </a:p>
           <a:p>
             <a:pPr lvl="2"/>
             <a:r>
-              <a:rPr lang="en-US" smtClean="0"/>
+              <a:rPr lang="en-US"/>
               <a:t>Third level</a:t>
             </a:r>
           </a:p>
           <a:p>
             <a:pPr lvl="3"/>
             <a:r>
-              <a:rPr lang="en-US" smtClean="0"/>
+              <a:rPr lang="en-US"/>
               <a:t>Fourth level</a:t>
             </a:r>
           </a:p>
           <a:p>
             <a:pPr lvl="4"/>
             <a:r>
-              <a:rPr lang="en-US" smtClean="0"/>
+              <a:rPr lang="en-US"/>
               <a:t>Fifth level</a:t>
             </a:r>
-            <a:endParaRPr lang="en-US"/>
-          </a:p>
-        </p:txBody>
-      </p:sp>
-      <p:sp>
-        <p:nvSpPr>
-          <p:cNvPr id="4" name="Content Placeholder 3"/>
+          </a:p>
+        </p:txBody>
+      </p:sp>
+      <p:sp>
+        <p:nvSpPr>
+          <p:cNvPr id="4" name="Content Placeholder 3">
+            <a:extLst>
+              <a:ext uri="{FF2B5EF4-FFF2-40B4-BE49-F238E27FC236}">
+                <a16:creationId xmlns:a16="http://schemas.microsoft.com/office/drawing/2014/main" id="{355AE81F-541B-4969-BAEF-8F8149948296}"/>
+              </a:ext>
+            </a:extLst>
+          </p:cNvPr>
           <p:cNvSpPr>
             <a:spLocks noGrp="1"/>
           </p:cNvSpPr>
@@ -1256,97 +1340,74 @@
         </p:nvSpPr>
         <p:spPr>
           <a:xfrm>
-            <a:off x="4648200" y="1600200"/>
-            <a:ext cx="4038600" cy="4525963"/>
+            <a:off x="6172200" y="1825625"/>
+            <a:ext cx="5181600" cy="4351338"/>
           </a:xfrm>
         </p:spPr>
         <p:txBody>
           <a:bodyPr/>
-          <a:lstStyle>
-            <a:lvl1pPr>
-              <a:defRPr sz="2800"/>
-            </a:lvl1pPr>
-            <a:lvl2pPr>
-              <a:defRPr sz="2400"/>
-            </a:lvl2pPr>
-            <a:lvl3pPr>
-              <a:defRPr sz="2000"/>
-            </a:lvl3pPr>
-            <a:lvl4pPr>
-              <a:defRPr sz="1800"/>
-            </a:lvl4pPr>
-            <a:lvl5pPr>
-              <a:defRPr sz="1800"/>
-            </a:lvl5pPr>
-            <a:lvl6pPr>
-              <a:defRPr sz="1800"/>
-            </a:lvl6pPr>
-            <a:lvl7pPr>
-              <a:defRPr sz="1800"/>
-            </a:lvl7pPr>
-            <a:lvl8pPr>
-              <a:defRPr sz="1800"/>
-            </a:lvl8pPr>
-            <a:lvl9pPr>
-              <a:defRPr sz="1800"/>
-            </a:lvl9pPr>
-          </a:lstStyle>
+          <a:lstStyle/>
           <a:p>
             <a:pPr lvl="0"/>
             <a:r>
+              <a:rPr lang="en-US"/>
+              <a:t>Edit Master text styles</a:t>
+            </a:r>
+          </a:p>
+          <a:p>
+            <a:pPr lvl="1"/>
+            <a:r>
+              <a:rPr lang="en-US"/>
+              <a:t>Second level</a:t>
+            </a:r>
+          </a:p>
+          <a:p>
+            <a:pPr lvl="2"/>
+            <a:r>
+              <a:rPr lang="en-US"/>
+              <a:t>Third level</a:t>
+            </a:r>
+          </a:p>
+          <a:p>
+            <a:pPr lvl="3"/>
+            <a:r>
+              <a:rPr lang="en-US"/>
+              <a:t>Fourth level</a:t>
+            </a:r>
+          </a:p>
+          <a:p>
+            <a:pPr lvl="4"/>
+            <a:r>
+              <a:rPr lang="en-US"/>
+              <a:t>Fifth level</a:t>
+            </a:r>
+          </a:p>
+        </p:txBody>
+      </p:sp>
+      <p:sp>
+        <p:nvSpPr>
+          <p:cNvPr id="5" name="Date Placeholder 4">
+            <a:extLst>
+              <a:ext uri="{FF2B5EF4-FFF2-40B4-BE49-F238E27FC236}">
+                <a16:creationId xmlns:a16="http://schemas.microsoft.com/office/drawing/2014/main" id="{9E2CD98A-D894-494E-ABFE-2582C1216CE8}"/>
+              </a:ext>
+            </a:extLst>
+          </p:cNvPr>
+          <p:cNvSpPr>
+            <a:spLocks noGrp="1"/>
+          </p:cNvSpPr>
+          <p:nvPr>
+            <p:ph type="dt" sz="half" idx="10"/>
+          </p:nvPr>
+        </p:nvSpPr>
+        <p:spPr/>
+        <p:txBody>
+          <a:bodyPr/>
+          <a:lstStyle/>
+          <a:p>
+            <a:fld id="{B11CAE26-DC4B-40B0-AA71-79A794444606}" type="datetimeFigureOut">
               <a:rPr lang="en-US" smtClean="0"/>
-              <a:t>Click to edit Master text styles</a:t>
-            </a:r>
-          </a:p>
-          <a:p>
-            <a:pPr lvl="1"/>
-            <a:r>
-              <a:rPr lang="en-US" smtClean="0"/>
-              <a:t>Second level</a:t>
-            </a:r>
-          </a:p>
-          <a:p>
-            <a:pPr lvl="2"/>
-            <a:r>
-              <a:rPr lang="en-US" smtClean="0"/>
-              <a:t>Third level</a:t>
-            </a:r>
-          </a:p>
-          <a:p>
-            <a:pPr lvl="3"/>
-            <a:r>
-              <a:rPr lang="en-US" smtClean="0"/>
-              <a:t>Fourth level</a:t>
-            </a:r>
-          </a:p>
-          <a:p>
-            <a:pPr lvl="4"/>
-            <a:r>
-              <a:rPr lang="en-US" smtClean="0"/>
-              <a:t>Fifth level</a:t>
-            </a:r>
-            <a:endParaRPr lang="en-US"/>
-          </a:p>
-        </p:txBody>
-      </p:sp>
-      <p:sp>
-        <p:nvSpPr>
-          <p:cNvPr id="5" name="Date Placeholder 4"/>
-          <p:cNvSpPr>
-            <a:spLocks noGrp="1"/>
-          </p:cNvSpPr>
-          <p:nvPr>
-            <p:ph type="dt" sz="half" idx="10"/>
-          </p:nvPr>
-        </p:nvSpPr>
-        <p:spPr/>
-        <p:txBody>
-          <a:bodyPr/>
-          <a:lstStyle/>
-          <a:p>
-            <a:fld id="{5BCAD085-E8A6-8845-BD4E-CB4CCA059FC4}" type="datetimeFigureOut">
-              <a:rPr lang="en-US" smtClean="0"/>
-              <a:t>1/27/13</a:t>
+              <a:t>3/2/2018</a:t>
             </a:fld>
             <a:endParaRPr lang="en-US"/>
           </a:p>
@@ -1354,7 +1415,13 @@
       </p:sp>
       <p:sp>
         <p:nvSpPr>
-          <p:cNvPr id="6" name="Footer Placeholder 5"/>
+          <p:cNvPr id="6" name="Footer Placeholder 5">
+            <a:extLst>
+              <a:ext uri="{FF2B5EF4-FFF2-40B4-BE49-F238E27FC236}">
+                <a16:creationId xmlns:a16="http://schemas.microsoft.com/office/drawing/2014/main" id="{764C2DAE-A0BB-4524-9F63-807D2A5369F7}"/>
+              </a:ext>
+            </a:extLst>
+          </p:cNvPr>
           <p:cNvSpPr>
             <a:spLocks noGrp="1"/>
           </p:cNvSpPr>
@@ -1373,7 +1440,13 @@
       </p:sp>
       <p:sp>
         <p:nvSpPr>
-          <p:cNvPr id="7" name="Slide Number Placeholder 6"/>
+          <p:cNvPr id="7" name="Slide Number Placeholder 6">
+            <a:extLst>
+              <a:ext uri="{FF2B5EF4-FFF2-40B4-BE49-F238E27FC236}">
+                <a16:creationId xmlns:a16="http://schemas.microsoft.com/office/drawing/2014/main" id="{929623BA-12B0-438D-BC16-07BF91DFFEA8}"/>
+              </a:ext>
+            </a:extLst>
+          </p:cNvPr>
           <p:cNvSpPr>
             <a:spLocks noGrp="1"/>
           </p:cNvSpPr>
@@ -1386,7 +1459,7 @@
           <a:bodyPr/>
           <a:lstStyle/>
           <a:p>
-            <a:fld id="{C1FF6DA9-008F-8B48-92A6-B652298478BF}" type="slidenum">
+            <a:fld id="{5F02EBD8-602C-4319-9146-7430882F2051}" type="slidenum">
               <a:rPr lang="en-US" smtClean="0"/>
               <a:t>‹#›</a:t>
             </a:fld>
@@ -1397,7 +1470,7 @@
     </p:spTree>
     <p:extLst>
       <p:ext uri="{BB962C8B-B14F-4D97-AF65-F5344CB8AC3E}">
-        <p14:creationId xmlns:p14="http://schemas.microsoft.com/office/powerpoint/2010/main" val="2782244947"/>
+        <p14:creationId xmlns:p14="http://schemas.microsoft.com/office/powerpoint/2010/main" val="1540773299"/>
       </p:ext>
     </p:extLst>
   </p:cSld>
@@ -1426,45 +1499,57 @@
       </p:grpSpPr>
       <p:sp>
         <p:nvSpPr>
-          <p:cNvPr id="2" name="Title 1"/>
+          <p:cNvPr id="2" name="Title 1">
+            <a:extLst>
+              <a:ext uri="{FF2B5EF4-FFF2-40B4-BE49-F238E27FC236}">
+                <a16:creationId xmlns:a16="http://schemas.microsoft.com/office/drawing/2014/main" id="{065A8036-74E0-4070-BE7C-9AD0EE0DAD85}"/>
+              </a:ext>
+            </a:extLst>
+          </p:cNvPr>
           <p:cNvSpPr>
             <a:spLocks noGrp="1"/>
           </p:cNvSpPr>
           <p:nvPr>
             <p:ph type="title"/>
-          </p:nvPr>
-        </p:nvSpPr>
-        <p:spPr/>
-        <p:txBody>
-          <a:bodyPr/>
-          <a:lstStyle>
-            <a:lvl1pPr>
-              <a:defRPr/>
-            </a:lvl1pPr>
-          </a:lstStyle>
-          <a:p>
-            <a:r>
-              <a:rPr lang="en-US" smtClean="0"/>
-              <a:t>Click to edit Master title style</a:t>
-            </a:r>
-            <a:endParaRPr lang="en-US"/>
-          </a:p>
-        </p:txBody>
-      </p:sp>
-      <p:sp>
-        <p:nvSpPr>
-          <p:cNvPr id="3" name="Text Placeholder 2"/>
-          <p:cNvSpPr>
-            <a:spLocks noGrp="1"/>
-          </p:cNvSpPr>
-          <p:nvPr>
-            <p:ph type="body" idx="1"/>
           </p:nvPr>
         </p:nvSpPr>
         <p:spPr>
           <a:xfrm>
-            <a:off x="457200" y="1535113"/>
-            <a:ext cx="4040188" cy="639762"/>
+            <a:off x="839788" y="365125"/>
+            <a:ext cx="10515600" cy="1325563"/>
+          </a:xfrm>
+        </p:spPr>
+        <p:txBody>
+          <a:bodyPr/>
+          <a:lstStyle/>
+          <a:p>
+            <a:r>
+              <a:rPr lang="en-US"/>
+              <a:t>Click to edit Master title style</a:t>
+            </a:r>
+          </a:p>
+        </p:txBody>
+      </p:sp>
+      <p:sp>
+        <p:nvSpPr>
+          <p:cNvPr id="3" name="Text Placeholder 2">
+            <a:extLst>
+              <a:ext uri="{FF2B5EF4-FFF2-40B4-BE49-F238E27FC236}">
+                <a16:creationId xmlns:a16="http://schemas.microsoft.com/office/drawing/2014/main" id="{A261D20F-9469-475D-ABBA-8499506484DA}"/>
+              </a:ext>
+            </a:extLst>
+          </p:cNvPr>
+          <p:cNvSpPr>
+            <a:spLocks noGrp="1"/>
+          </p:cNvSpPr>
+          <p:nvPr>
+            <p:ph type="body" idx="1"/>
+          </p:nvPr>
+        </p:nvSpPr>
+        <p:spPr>
+          <a:xfrm>
+            <a:off x="839788" y="1681163"/>
+            <a:ext cx="5157787" cy="823912"/>
           </a:xfrm>
         </p:spPr>
         <p:txBody>
@@ -1510,15 +1595,21 @@
           <a:p>
             <a:pPr lvl="0"/>
             <a:r>
-              <a:rPr lang="en-US" smtClean="0"/>
-              <a:t>Click to edit Master text styles</a:t>
-            </a:r>
-          </a:p>
-        </p:txBody>
-      </p:sp>
-      <p:sp>
-        <p:nvSpPr>
-          <p:cNvPr id="4" name="Content Placeholder 3"/>
+              <a:rPr lang="en-US"/>
+              <a:t>Edit Master text styles</a:t>
+            </a:r>
+          </a:p>
+        </p:txBody>
+      </p:sp>
+      <p:sp>
+        <p:nvSpPr>
+          <p:cNvPr id="4" name="Content Placeholder 3">
+            <a:extLst>
+              <a:ext uri="{FF2B5EF4-FFF2-40B4-BE49-F238E27FC236}">
+                <a16:creationId xmlns:a16="http://schemas.microsoft.com/office/drawing/2014/main" id="{7255C754-F920-42BF-9754-594074EB7153}"/>
+              </a:ext>
+            </a:extLst>
+          </p:cNvPr>
           <p:cNvSpPr>
             <a:spLocks noGrp="1"/>
           </p:cNvSpPr>
@@ -1528,82 +1619,59 @@
         </p:nvSpPr>
         <p:spPr>
           <a:xfrm>
-            <a:off x="457200" y="2174875"/>
-            <a:ext cx="4040188" cy="3951288"/>
+            <a:off x="839788" y="2505075"/>
+            <a:ext cx="5157787" cy="3684588"/>
           </a:xfrm>
         </p:spPr>
         <p:txBody>
           <a:bodyPr/>
-          <a:lstStyle>
-            <a:lvl1pPr>
-              <a:defRPr sz="2400"/>
-            </a:lvl1pPr>
-            <a:lvl2pPr>
-              <a:defRPr sz="2000"/>
-            </a:lvl2pPr>
-            <a:lvl3pPr>
-              <a:defRPr sz="1800"/>
-            </a:lvl3pPr>
-            <a:lvl4pPr>
-              <a:defRPr sz="1600"/>
-            </a:lvl4pPr>
-            <a:lvl5pPr>
-              <a:defRPr sz="1600"/>
-            </a:lvl5pPr>
-            <a:lvl6pPr>
-              <a:defRPr sz="1600"/>
-            </a:lvl6pPr>
-            <a:lvl7pPr>
-              <a:defRPr sz="1600"/>
-            </a:lvl7pPr>
-            <a:lvl8pPr>
-              <a:defRPr sz="1600"/>
-            </a:lvl8pPr>
-            <a:lvl9pPr>
-              <a:defRPr sz="1600"/>
-            </a:lvl9pPr>
-          </a:lstStyle>
+          <a:lstStyle/>
           <a:p>
             <a:pPr lvl="0"/>
             <a:r>
-              <a:rPr lang="en-US" smtClean="0"/>
-              <a:t>Click to edit Master text styles</a:t>
+              <a:rPr lang="en-US"/>
+              <a:t>Edit Master text styles</a:t>
             </a:r>
           </a:p>
           <a:p>
             <a:pPr lvl="1"/>
             <a:r>
-              <a:rPr lang="en-US" smtClean="0"/>
+              <a:rPr lang="en-US"/>
               <a:t>Second level</a:t>
             </a:r>
           </a:p>
           <a:p>
             <a:pPr lvl="2"/>
             <a:r>
-              <a:rPr lang="en-US" smtClean="0"/>
+              <a:rPr lang="en-US"/>
               <a:t>Third level</a:t>
             </a:r>
           </a:p>
           <a:p>
             <a:pPr lvl="3"/>
             <a:r>
-              <a:rPr lang="en-US" smtClean="0"/>
+              <a:rPr lang="en-US"/>
               <a:t>Fourth level</a:t>
             </a:r>
           </a:p>
           <a:p>
             <a:pPr lvl="4"/>
             <a:r>
-              <a:rPr lang="en-US" smtClean="0"/>
+              <a:rPr lang="en-US"/>
               <a:t>Fifth level</a:t>
             </a:r>
-            <a:endParaRPr lang="en-US"/>
-          </a:p>
-        </p:txBody>
-      </p:sp>
-      <p:sp>
-        <p:nvSpPr>
-          <p:cNvPr id="5" name="Text Placeholder 4"/>
+          </a:p>
+        </p:txBody>
+      </p:sp>
+      <p:sp>
+        <p:nvSpPr>
+          <p:cNvPr id="5" name="Text Placeholder 4">
+            <a:extLst>
+              <a:ext uri="{FF2B5EF4-FFF2-40B4-BE49-F238E27FC236}">
+                <a16:creationId xmlns:a16="http://schemas.microsoft.com/office/drawing/2014/main" id="{C62E426E-9EA3-457C-BCCC-0E5C8FCD5C76}"/>
+              </a:ext>
+            </a:extLst>
+          </p:cNvPr>
           <p:cNvSpPr>
             <a:spLocks noGrp="1"/>
           </p:cNvSpPr>
@@ -1613,8 +1681,8 @@
         </p:nvSpPr>
         <p:spPr>
           <a:xfrm>
-            <a:off x="4645025" y="1535113"/>
-            <a:ext cx="4041775" cy="639762"/>
+            <a:off x="6172200" y="1681163"/>
+            <a:ext cx="5183188" cy="823912"/>
           </a:xfrm>
         </p:spPr>
         <p:txBody>
@@ -1660,15 +1728,21 @@
           <a:p>
             <a:pPr lvl="0"/>
             <a:r>
-              <a:rPr lang="en-US" smtClean="0"/>
-              <a:t>Click to edit Master text styles</a:t>
-            </a:r>
-          </a:p>
-        </p:txBody>
-      </p:sp>
-      <p:sp>
-        <p:nvSpPr>
-          <p:cNvPr id="6" name="Content Placeholder 5"/>
+              <a:rPr lang="en-US"/>
+              <a:t>Edit Master text styles</a:t>
+            </a:r>
+          </a:p>
+        </p:txBody>
+      </p:sp>
+      <p:sp>
+        <p:nvSpPr>
+          <p:cNvPr id="6" name="Content Placeholder 5">
+            <a:extLst>
+              <a:ext uri="{FF2B5EF4-FFF2-40B4-BE49-F238E27FC236}">
+                <a16:creationId xmlns:a16="http://schemas.microsoft.com/office/drawing/2014/main" id="{08AF7FD0-C47C-41E7-987C-EE361BC5846B}"/>
+              </a:ext>
+            </a:extLst>
+          </p:cNvPr>
           <p:cNvSpPr>
             <a:spLocks noGrp="1"/>
           </p:cNvSpPr>
@@ -1678,97 +1752,74 @@
         </p:nvSpPr>
         <p:spPr>
           <a:xfrm>
-            <a:off x="4645025" y="2174875"/>
-            <a:ext cx="4041775" cy="3951288"/>
+            <a:off x="6172200" y="2505075"/>
+            <a:ext cx="5183188" cy="3684588"/>
           </a:xfrm>
         </p:spPr>
         <p:txBody>
           <a:bodyPr/>
-          <a:lstStyle>
-            <a:lvl1pPr>
-              <a:defRPr sz="2400"/>
-            </a:lvl1pPr>
-            <a:lvl2pPr>
-              <a:defRPr sz="2000"/>
-            </a:lvl2pPr>
-            <a:lvl3pPr>
-              <a:defRPr sz="1800"/>
-            </a:lvl3pPr>
-            <a:lvl4pPr>
-              <a:defRPr sz="1600"/>
-            </a:lvl4pPr>
-            <a:lvl5pPr>
-              <a:defRPr sz="1600"/>
-            </a:lvl5pPr>
-            <a:lvl6pPr>
-              <a:defRPr sz="1600"/>
-            </a:lvl6pPr>
-            <a:lvl7pPr>
-              <a:defRPr sz="1600"/>
-            </a:lvl7pPr>
-            <a:lvl8pPr>
-              <a:defRPr sz="1600"/>
-            </a:lvl8pPr>
-            <a:lvl9pPr>
-              <a:defRPr sz="1600"/>
-            </a:lvl9pPr>
-          </a:lstStyle>
+          <a:lstStyle/>
           <a:p>
             <a:pPr lvl="0"/>
             <a:r>
+              <a:rPr lang="en-US"/>
+              <a:t>Edit Master text styles</a:t>
+            </a:r>
+          </a:p>
+          <a:p>
+            <a:pPr lvl="1"/>
+            <a:r>
+              <a:rPr lang="en-US"/>
+              <a:t>Second level</a:t>
+            </a:r>
+          </a:p>
+          <a:p>
+            <a:pPr lvl="2"/>
+            <a:r>
+              <a:rPr lang="en-US"/>
+              <a:t>Third level</a:t>
+            </a:r>
+          </a:p>
+          <a:p>
+            <a:pPr lvl="3"/>
+            <a:r>
+              <a:rPr lang="en-US"/>
+              <a:t>Fourth level</a:t>
+            </a:r>
+          </a:p>
+          <a:p>
+            <a:pPr lvl="4"/>
+            <a:r>
+              <a:rPr lang="en-US"/>
+              <a:t>Fifth level</a:t>
+            </a:r>
+          </a:p>
+        </p:txBody>
+      </p:sp>
+      <p:sp>
+        <p:nvSpPr>
+          <p:cNvPr id="7" name="Date Placeholder 6">
+            <a:extLst>
+              <a:ext uri="{FF2B5EF4-FFF2-40B4-BE49-F238E27FC236}">
+                <a16:creationId xmlns:a16="http://schemas.microsoft.com/office/drawing/2014/main" id="{7A233119-52AE-4235-AFE0-ADBB6EFE4E29}"/>
+              </a:ext>
+            </a:extLst>
+          </p:cNvPr>
+          <p:cNvSpPr>
+            <a:spLocks noGrp="1"/>
+          </p:cNvSpPr>
+          <p:nvPr>
+            <p:ph type="dt" sz="half" idx="10"/>
+          </p:nvPr>
+        </p:nvSpPr>
+        <p:spPr/>
+        <p:txBody>
+          <a:bodyPr/>
+          <a:lstStyle/>
+          <a:p>
+            <a:fld id="{B11CAE26-DC4B-40B0-AA71-79A794444606}" type="datetimeFigureOut">
               <a:rPr lang="en-US" smtClean="0"/>
-              <a:t>Click to edit Master text styles</a:t>
-            </a:r>
-          </a:p>
-          <a:p>
-            <a:pPr lvl="1"/>
-            <a:r>
-              <a:rPr lang="en-US" smtClean="0"/>
-              <a:t>Second level</a:t>
-            </a:r>
-          </a:p>
-          <a:p>
-            <a:pPr lvl="2"/>
-            <a:r>
-              <a:rPr lang="en-US" smtClean="0"/>
-              <a:t>Third level</a:t>
-            </a:r>
-          </a:p>
-          <a:p>
-            <a:pPr lvl="3"/>
-            <a:r>
-              <a:rPr lang="en-US" smtClean="0"/>
-              <a:t>Fourth level</a:t>
-            </a:r>
-          </a:p>
-          <a:p>
-            <a:pPr lvl="4"/>
-            <a:r>
-              <a:rPr lang="en-US" smtClean="0"/>
-              <a:t>Fifth level</a:t>
-            </a:r>
-            <a:endParaRPr lang="en-US"/>
-          </a:p>
-        </p:txBody>
-      </p:sp>
-      <p:sp>
-        <p:nvSpPr>
-          <p:cNvPr id="7" name="Date Placeholder 6"/>
-          <p:cNvSpPr>
-            <a:spLocks noGrp="1"/>
-          </p:cNvSpPr>
-          <p:nvPr>
-            <p:ph type="dt" sz="half" idx="10"/>
-          </p:nvPr>
-        </p:nvSpPr>
-        <p:spPr/>
-        <p:txBody>
-          <a:bodyPr/>
-          <a:lstStyle/>
-          <a:p>
-            <a:fld id="{5BCAD085-E8A6-8845-BD4E-CB4CCA059FC4}" type="datetimeFigureOut">
-              <a:rPr lang="en-US" smtClean="0"/>
-              <a:t>1/27/13</a:t>
+              <a:t>3/2/2018</a:t>
             </a:fld>
             <a:endParaRPr lang="en-US"/>
           </a:p>
@@ -1776,7 +1827,13 @@
       </p:sp>
       <p:sp>
         <p:nvSpPr>
-          <p:cNvPr id="8" name="Footer Placeholder 7"/>
+          <p:cNvPr id="8" name="Footer Placeholder 7">
+            <a:extLst>
+              <a:ext uri="{FF2B5EF4-FFF2-40B4-BE49-F238E27FC236}">
+                <a16:creationId xmlns:a16="http://schemas.microsoft.com/office/drawing/2014/main" id="{60DA2E9F-9B77-4AD1-97BB-96E664FB2833}"/>
+              </a:ext>
+            </a:extLst>
+          </p:cNvPr>
           <p:cNvSpPr>
             <a:spLocks noGrp="1"/>
           </p:cNvSpPr>
@@ -1795,7 +1852,13 @@
       </p:sp>
       <p:sp>
         <p:nvSpPr>
-          <p:cNvPr id="9" name="Slide Number Placeholder 8"/>
+          <p:cNvPr id="9" name="Slide Number Placeholder 8">
+            <a:extLst>
+              <a:ext uri="{FF2B5EF4-FFF2-40B4-BE49-F238E27FC236}">
+                <a16:creationId xmlns:a16="http://schemas.microsoft.com/office/drawing/2014/main" id="{0422A391-8882-4E6F-BCC4-319F6B26ADE7}"/>
+              </a:ext>
+            </a:extLst>
+          </p:cNvPr>
           <p:cNvSpPr>
             <a:spLocks noGrp="1"/>
           </p:cNvSpPr>
@@ -1808,7 +1871,7 @@
           <a:bodyPr/>
           <a:lstStyle/>
           <a:p>
-            <a:fld id="{C1FF6DA9-008F-8B48-92A6-B652298478BF}" type="slidenum">
+            <a:fld id="{5F02EBD8-602C-4319-9146-7430882F2051}" type="slidenum">
               <a:rPr lang="en-US" smtClean="0"/>
               <a:t>‹#›</a:t>
             </a:fld>
@@ -1819,7 +1882,7 @@
     </p:spTree>
     <p:extLst>
       <p:ext uri="{BB962C8B-B14F-4D97-AF65-F5344CB8AC3E}">
-        <p14:creationId xmlns:p14="http://schemas.microsoft.com/office/powerpoint/2010/main" val="990158736"/>
+        <p14:creationId xmlns:p14="http://schemas.microsoft.com/office/powerpoint/2010/main" val="295638540"/>
       </p:ext>
     </p:extLst>
   </p:cSld>
@@ -1848,7 +1911,13 @@
       </p:grpSpPr>
       <p:sp>
         <p:nvSpPr>
-          <p:cNvPr id="2" name="Title 1"/>
+          <p:cNvPr id="2" name="Title 1">
+            <a:extLst>
+              <a:ext uri="{FF2B5EF4-FFF2-40B4-BE49-F238E27FC236}">
+                <a16:creationId xmlns:a16="http://schemas.microsoft.com/office/drawing/2014/main" id="{3B366EBD-A07F-4CE4-89E2-475FA5421009}"/>
+              </a:ext>
+            </a:extLst>
+          </p:cNvPr>
           <p:cNvSpPr>
             <a:spLocks noGrp="1"/>
           </p:cNvSpPr>
@@ -1862,31 +1931,36 @@
           <a:lstStyle/>
           <a:p>
             <a:r>
+              <a:rPr lang="en-US"/>
+              <a:t>Click to edit Master title style</a:t>
+            </a:r>
+          </a:p>
+        </p:txBody>
+      </p:sp>
+      <p:sp>
+        <p:nvSpPr>
+          <p:cNvPr id="3" name="Date Placeholder 2">
+            <a:extLst>
+              <a:ext uri="{FF2B5EF4-FFF2-40B4-BE49-F238E27FC236}">
+                <a16:creationId xmlns:a16="http://schemas.microsoft.com/office/drawing/2014/main" id="{DACDAFBD-4A15-4CEC-BE3B-A6917286D937}"/>
+              </a:ext>
+            </a:extLst>
+          </p:cNvPr>
+          <p:cNvSpPr>
+            <a:spLocks noGrp="1"/>
+          </p:cNvSpPr>
+          <p:nvPr>
+            <p:ph type="dt" sz="half" idx="10"/>
+          </p:nvPr>
+        </p:nvSpPr>
+        <p:spPr/>
+        <p:txBody>
+          <a:bodyPr/>
+          <a:lstStyle/>
+          <a:p>
+            <a:fld id="{B11CAE26-DC4B-40B0-AA71-79A794444606}" type="datetimeFigureOut">
               <a:rPr lang="en-US" smtClean="0"/>
-              <a:t>Click to edit Master title style</a:t>
-            </a:r>
-            <a:endParaRPr lang="en-US"/>
-          </a:p>
-        </p:txBody>
-      </p:sp>
-      <p:sp>
-        <p:nvSpPr>
-          <p:cNvPr id="3" name="Date Placeholder 2"/>
-          <p:cNvSpPr>
-            <a:spLocks noGrp="1"/>
-          </p:cNvSpPr>
-          <p:nvPr>
-            <p:ph type="dt" sz="half" idx="10"/>
-          </p:nvPr>
-        </p:nvSpPr>
-        <p:spPr/>
-        <p:txBody>
-          <a:bodyPr/>
-          <a:lstStyle/>
-          <a:p>
-            <a:fld id="{5BCAD085-E8A6-8845-BD4E-CB4CCA059FC4}" type="datetimeFigureOut">
-              <a:rPr lang="en-US" smtClean="0"/>
-              <a:t>1/27/13</a:t>
+              <a:t>3/2/2018</a:t>
             </a:fld>
             <a:endParaRPr lang="en-US"/>
           </a:p>
@@ -1894,7 +1968,13 @@
       </p:sp>
       <p:sp>
         <p:nvSpPr>
-          <p:cNvPr id="4" name="Footer Placeholder 3"/>
+          <p:cNvPr id="4" name="Footer Placeholder 3">
+            <a:extLst>
+              <a:ext uri="{FF2B5EF4-FFF2-40B4-BE49-F238E27FC236}">
+                <a16:creationId xmlns:a16="http://schemas.microsoft.com/office/drawing/2014/main" id="{84998020-F32A-4BE7-B57A-5FC2B359D78F}"/>
+              </a:ext>
+            </a:extLst>
+          </p:cNvPr>
           <p:cNvSpPr>
             <a:spLocks noGrp="1"/>
           </p:cNvSpPr>
@@ -1913,7 +1993,13 @@
       </p:sp>
       <p:sp>
         <p:nvSpPr>
-          <p:cNvPr id="5" name="Slide Number Placeholder 4"/>
+          <p:cNvPr id="5" name="Slide Number Placeholder 4">
+            <a:extLst>
+              <a:ext uri="{FF2B5EF4-FFF2-40B4-BE49-F238E27FC236}">
+                <a16:creationId xmlns:a16="http://schemas.microsoft.com/office/drawing/2014/main" id="{42CB49BA-9D88-4395-A868-D9F39FEC33DB}"/>
+              </a:ext>
+            </a:extLst>
+          </p:cNvPr>
           <p:cNvSpPr>
             <a:spLocks noGrp="1"/>
           </p:cNvSpPr>
@@ -1926,7 +2012,7 @@
           <a:bodyPr/>
           <a:lstStyle/>
           <a:p>
-            <a:fld id="{C1FF6DA9-008F-8B48-92A6-B652298478BF}" type="slidenum">
+            <a:fld id="{5F02EBD8-602C-4319-9146-7430882F2051}" type="slidenum">
               <a:rPr lang="en-US" smtClean="0"/>
               <a:t>‹#›</a:t>
             </a:fld>
@@ -1937,7 +2023,7 @@
     </p:spTree>
     <p:extLst>
       <p:ext uri="{BB962C8B-B14F-4D97-AF65-F5344CB8AC3E}">
-        <p14:creationId xmlns:p14="http://schemas.microsoft.com/office/powerpoint/2010/main" val="727027711"/>
+        <p14:creationId xmlns:p14="http://schemas.microsoft.com/office/powerpoint/2010/main" val="2577521161"/>
       </p:ext>
     </p:extLst>
   </p:cSld>
@@ -1966,7 +2052,13 @@
       </p:grpSpPr>
       <p:sp>
         <p:nvSpPr>
-          <p:cNvPr id="2" name="Date Placeholder 1"/>
+          <p:cNvPr id="2" name="Date Placeholder 1">
+            <a:extLst>
+              <a:ext uri="{FF2B5EF4-FFF2-40B4-BE49-F238E27FC236}">
+                <a16:creationId xmlns:a16="http://schemas.microsoft.com/office/drawing/2014/main" id="{04578A33-5054-4721-8DDD-DEC241E11E67}"/>
+              </a:ext>
+            </a:extLst>
+          </p:cNvPr>
           <p:cNvSpPr>
             <a:spLocks noGrp="1"/>
           </p:cNvSpPr>
@@ -1979,9 +2071,9 @@
           <a:bodyPr/>
           <a:lstStyle/>
           <a:p>
-            <a:fld id="{5BCAD085-E8A6-8845-BD4E-CB4CCA059FC4}" type="datetimeFigureOut">
+            <a:fld id="{B11CAE26-DC4B-40B0-AA71-79A794444606}" type="datetimeFigureOut">
               <a:rPr lang="en-US" smtClean="0"/>
-              <a:t>1/27/13</a:t>
+              <a:t>3/2/2018</a:t>
             </a:fld>
             <a:endParaRPr lang="en-US"/>
           </a:p>
@@ -1989,7 +2081,13 @@
       </p:sp>
       <p:sp>
         <p:nvSpPr>
-          <p:cNvPr id="3" name="Footer Placeholder 2"/>
+          <p:cNvPr id="3" name="Footer Placeholder 2">
+            <a:extLst>
+              <a:ext uri="{FF2B5EF4-FFF2-40B4-BE49-F238E27FC236}">
+                <a16:creationId xmlns:a16="http://schemas.microsoft.com/office/drawing/2014/main" id="{D70EC27C-BBFF-43CF-8942-7074E81CC4B9}"/>
+              </a:ext>
+            </a:extLst>
+          </p:cNvPr>
           <p:cNvSpPr>
             <a:spLocks noGrp="1"/>
           </p:cNvSpPr>
@@ -2008,7 +2106,13 @@
       </p:sp>
       <p:sp>
         <p:nvSpPr>
-          <p:cNvPr id="4" name="Slide Number Placeholder 3"/>
+          <p:cNvPr id="4" name="Slide Number Placeholder 3">
+            <a:extLst>
+              <a:ext uri="{FF2B5EF4-FFF2-40B4-BE49-F238E27FC236}">
+                <a16:creationId xmlns:a16="http://schemas.microsoft.com/office/drawing/2014/main" id="{27EEC17E-7CE9-46F1-93E7-DAB6B250B4CE}"/>
+              </a:ext>
+            </a:extLst>
+          </p:cNvPr>
           <p:cNvSpPr>
             <a:spLocks noGrp="1"/>
           </p:cNvSpPr>
@@ -2021,7 +2125,7 @@
           <a:bodyPr/>
           <a:lstStyle/>
           <a:p>
-            <a:fld id="{C1FF6DA9-008F-8B48-92A6-B652298478BF}" type="slidenum">
+            <a:fld id="{5F02EBD8-602C-4319-9146-7430882F2051}" type="slidenum">
               <a:rPr lang="en-US" smtClean="0"/>
               <a:t>‹#›</a:t>
             </a:fld>
@@ -2032,7 +2136,7 @@
     </p:spTree>
     <p:extLst>
       <p:ext uri="{BB962C8B-B14F-4D97-AF65-F5344CB8AC3E}">
-        <p14:creationId xmlns:p14="http://schemas.microsoft.com/office/powerpoint/2010/main" val="1212999818"/>
+        <p14:creationId xmlns:p14="http://schemas.microsoft.com/office/powerpoint/2010/main" val="1267331445"/>
       </p:ext>
     </p:extLst>
   </p:cSld>
@@ -2061,7 +2165,13 @@
       </p:grpSpPr>
       <p:sp>
         <p:nvSpPr>
-          <p:cNvPr id="2" name="Title 1"/>
+          <p:cNvPr id="2" name="Title 1">
+            <a:extLst>
+              <a:ext uri="{FF2B5EF4-FFF2-40B4-BE49-F238E27FC236}">
+                <a16:creationId xmlns:a16="http://schemas.microsoft.com/office/drawing/2014/main" id="{51D53853-5BCF-47FC-9F74-7C96C2E2500F}"/>
+              </a:ext>
+            </a:extLst>
+          </p:cNvPr>
           <p:cNvSpPr>
             <a:spLocks noGrp="1"/>
           </p:cNvSpPr>
@@ -2071,29 +2181,34 @@
         </p:nvSpPr>
         <p:spPr>
           <a:xfrm>
-            <a:off x="457200" y="273050"/>
-            <a:ext cx="3008313" cy="1162050"/>
+            <a:off x="839788" y="457200"/>
+            <a:ext cx="3932237" cy="1600200"/>
           </a:xfrm>
         </p:spPr>
         <p:txBody>
           <a:bodyPr anchor="b"/>
           <a:lstStyle>
-            <a:lvl1pPr algn="l">
-              <a:defRPr sz="2000" b="1"/>
+            <a:lvl1pPr>
+              <a:defRPr sz="3200"/>
             </a:lvl1pPr>
           </a:lstStyle>
           <a:p>
             <a:r>
-              <a:rPr lang="en-US" smtClean="0"/>
+              <a:rPr lang="en-US"/>
               <a:t>Click to edit Master title style</a:t>
             </a:r>
-            <a:endParaRPr lang="en-US"/>
-          </a:p>
-        </p:txBody>
-      </p:sp>
-      <p:sp>
-        <p:nvSpPr>
-          <p:cNvPr id="3" name="Content Placeholder 2"/>
+          </a:p>
+        </p:txBody>
+      </p:sp>
+      <p:sp>
+        <p:nvSpPr>
+          <p:cNvPr id="3" name="Content Placeholder 2">
+            <a:extLst>
+              <a:ext uri="{FF2B5EF4-FFF2-40B4-BE49-F238E27FC236}">
+                <a16:creationId xmlns:a16="http://schemas.microsoft.com/office/drawing/2014/main" id="{BBBC573F-A5A3-4AC6-8075-59FDC460EEBB}"/>
+              </a:ext>
+            </a:extLst>
+          </p:cNvPr>
           <p:cNvSpPr>
             <a:spLocks noGrp="1"/>
           </p:cNvSpPr>
@@ -2103,8 +2218,8 @@
         </p:nvSpPr>
         <p:spPr>
           <a:xfrm>
-            <a:off x="3575050" y="273050"/>
-            <a:ext cx="5111750" cy="5853113"/>
+            <a:off x="5183188" y="987425"/>
+            <a:ext cx="6172200" cy="4873625"/>
           </a:xfrm>
         </p:spPr>
         <p:txBody>
@@ -2141,44 +2256,49 @@
           <a:p>
             <a:pPr lvl="0"/>
             <a:r>
-              <a:rPr lang="en-US" smtClean="0"/>
-              <a:t>Click to edit Master text styles</a:t>
+              <a:rPr lang="en-US"/>
+              <a:t>Edit Master text styles</a:t>
             </a:r>
           </a:p>
           <a:p>
             <a:pPr lvl="1"/>
             <a:r>
-              <a:rPr lang="en-US" smtClean="0"/>
+              <a:rPr lang="en-US"/>
               <a:t>Second level</a:t>
             </a:r>
           </a:p>
           <a:p>
             <a:pPr lvl="2"/>
             <a:r>
-              <a:rPr lang="en-US" smtClean="0"/>
+              <a:rPr lang="en-US"/>
               <a:t>Third level</a:t>
             </a:r>
           </a:p>
           <a:p>
             <a:pPr lvl="3"/>
             <a:r>
-              <a:rPr lang="en-US" smtClean="0"/>
+              <a:rPr lang="en-US"/>
               <a:t>Fourth level</a:t>
             </a:r>
           </a:p>
           <a:p>
             <a:pPr lvl="4"/>
             <a:r>
-              <a:rPr lang="en-US" smtClean="0"/>
+              <a:rPr lang="en-US"/>
               <a:t>Fifth level</a:t>
             </a:r>
-            <a:endParaRPr lang="en-US"/>
-          </a:p>
-        </p:txBody>
-      </p:sp>
-      <p:sp>
-        <p:nvSpPr>
-          <p:cNvPr id="4" name="Text Placeholder 3"/>
+          </a:p>
+        </p:txBody>
+      </p:sp>
+      <p:sp>
+        <p:nvSpPr>
+          <p:cNvPr id="4" name="Text Placeholder 3">
+            <a:extLst>
+              <a:ext uri="{FF2B5EF4-FFF2-40B4-BE49-F238E27FC236}">
+                <a16:creationId xmlns:a16="http://schemas.microsoft.com/office/drawing/2014/main" id="{E0E48633-04C5-411E-BB62-822786DD7E7F}"/>
+              </a:ext>
+            </a:extLst>
+          </p:cNvPr>
           <p:cNvSpPr>
             <a:spLocks noGrp="1"/>
           </p:cNvSpPr>
@@ -2188,8 +2308,8 @@
         </p:nvSpPr>
         <p:spPr>
           <a:xfrm>
-            <a:off x="457200" y="1435100"/>
-            <a:ext cx="3008313" cy="4691063"/>
+            <a:off x="839788" y="2057400"/>
+            <a:ext cx="3932237" cy="3811588"/>
           </a:xfrm>
         </p:spPr>
         <p:txBody>
@@ -2197,68 +2317,74 @@
           <a:lstStyle>
             <a:lvl1pPr marL="0" indent="0">
               <a:buNone/>
-              <a:defRPr sz="1400"/>
+              <a:defRPr sz="1600"/>
             </a:lvl1pPr>
             <a:lvl2pPr marL="457200" indent="0">
               <a:buNone/>
-              <a:defRPr sz="1200"/>
+              <a:defRPr sz="1400"/>
             </a:lvl2pPr>
             <a:lvl3pPr marL="914400" indent="0">
               <a:buNone/>
-              <a:defRPr sz="1000"/>
+              <a:defRPr sz="1200"/>
             </a:lvl3pPr>
             <a:lvl4pPr marL="1371600" indent="0">
               <a:buNone/>
-              <a:defRPr sz="900"/>
+              <a:defRPr sz="1000"/>
             </a:lvl4pPr>
             <a:lvl5pPr marL="1828800" indent="0">
               <a:buNone/>
-              <a:defRPr sz="900"/>
+              <a:defRPr sz="1000"/>
             </a:lvl5pPr>
             <a:lvl6pPr marL="2286000" indent="0">
               <a:buNone/>
-              <a:defRPr sz="900"/>
+              <a:defRPr sz="1000"/>
             </a:lvl6pPr>
             <a:lvl7pPr marL="2743200" indent="0">
               <a:buNone/>
-              <a:defRPr sz="900"/>
+              <a:defRPr sz="1000"/>
             </a:lvl7pPr>
             <a:lvl8pPr marL="3200400" indent="0">
               <a:buNone/>
-              <a:defRPr sz="900"/>
+              <a:defRPr sz="1000"/>
             </a:lvl8pPr>
             <a:lvl9pPr marL="3657600" indent="0">
               <a:buNone/>
-              <a:defRPr sz="900"/>
+              <a:defRPr sz="1000"/>
             </a:lvl9pPr>
           </a:lstStyle>
           <a:p>
             <a:pPr lvl="0"/>
             <a:r>
+              <a:rPr lang="en-US"/>
+              <a:t>Edit Master text styles</a:t>
+            </a:r>
+          </a:p>
+        </p:txBody>
+      </p:sp>
+      <p:sp>
+        <p:nvSpPr>
+          <p:cNvPr id="5" name="Date Placeholder 4">
+            <a:extLst>
+              <a:ext uri="{FF2B5EF4-FFF2-40B4-BE49-F238E27FC236}">
+                <a16:creationId xmlns:a16="http://schemas.microsoft.com/office/drawing/2014/main" id="{80EED411-6A00-43AC-9BBC-4F08E628E9C0}"/>
+              </a:ext>
+            </a:extLst>
+          </p:cNvPr>
+          <p:cNvSpPr>
+            <a:spLocks noGrp="1"/>
+          </p:cNvSpPr>
+          <p:nvPr>
+            <p:ph type="dt" sz="half" idx="10"/>
+          </p:nvPr>
+        </p:nvSpPr>
+        <p:spPr/>
+        <p:txBody>
+          <a:bodyPr/>
+          <a:lstStyle/>
+          <a:p>
+            <a:fld id="{B11CAE26-DC4B-40B0-AA71-79A794444606}" type="datetimeFigureOut">
               <a:rPr lang="en-US" smtClean="0"/>
-              <a:t>Click to edit Master text styles</a:t>
-            </a:r>
-          </a:p>
-        </p:txBody>
-      </p:sp>
-      <p:sp>
-        <p:nvSpPr>
-          <p:cNvPr id="5" name="Date Placeholder 4"/>
-          <p:cNvSpPr>
-            <a:spLocks noGrp="1"/>
-          </p:cNvSpPr>
-          <p:nvPr>
-            <p:ph type="dt" sz="half" idx="10"/>
-          </p:nvPr>
-        </p:nvSpPr>
-        <p:spPr/>
-        <p:txBody>
-          <a:bodyPr/>
-          <a:lstStyle/>
-          <a:p>
-            <a:fld id="{5BCAD085-E8A6-8845-BD4E-CB4CCA059FC4}" type="datetimeFigureOut">
-              <a:rPr lang="en-US" smtClean="0"/>
-              <a:t>1/27/13</a:t>
+              <a:t>3/2/2018</a:t>
             </a:fld>
             <a:endParaRPr lang="en-US"/>
           </a:p>
@@ -2266,7 +2392,13 @@
       </p:sp>
       <p:sp>
         <p:nvSpPr>
-          <p:cNvPr id="6" name="Footer Placeholder 5"/>
+          <p:cNvPr id="6" name="Footer Placeholder 5">
+            <a:extLst>
+              <a:ext uri="{FF2B5EF4-FFF2-40B4-BE49-F238E27FC236}">
+                <a16:creationId xmlns:a16="http://schemas.microsoft.com/office/drawing/2014/main" id="{972A2C2F-3038-4CB2-8677-0A381C576A20}"/>
+              </a:ext>
+            </a:extLst>
+          </p:cNvPr>
           <p:cNvSpPr>
             <a:spLocks noGrp="1"/>
           </p:cNvSpPr>
@@ -2285,7 +2417,13 @@
       </p:sp>
       <p:sp>
         <p:nvSpPr>
-          <p:cNvPr id="7" name="Slide Number Placeholder 6"/>
+          <p:cNvPr id="7" name="Slide Number Placeholder 6">
+            <a:extLst>
+              <a:ext uri="{FF2B5EF4-FFF2-40B4-BE49-F238E27FC236}">
+                <a16:creationId xmlns:a16="http://schemas.microsoft.com/office/drawing/2014/main" id="{8F2FB4D3-8DD2-439E-8390-5216BF814782}"/>
+              </a:ext>
+            </a:extLst>
+          </p:cNvPr>
           <p:cNvSpPr>
             <a:spLocks noGrp="1"/>
           </p:cNvSpPr>
@@ -2298,7 +2436,7 @@
           <a:bodyPr/>
           <a:lstStyle/>
           <a:p>
-            <a:fld id="{C1FF6DA9-008F-8B48-92A6-B652298478BF}" type="slidenum">
+            <a:fld id="{5F02EBD8-602C-4319-9146-7430882F2051}" type="slidenum">
               <a:rPr lang="en-US" smtClean="0"/>
               <a:t>‹#›</a:t>
             </a:fld>
@@ -2309,7 +2447,7 @@
     </p:spTree>
     <p:extLst>
       <p:ext uri="{BB962C8B-B14F-4D97-AF65-F5344CB8AC3E}">
-        <p14:creationId xmlns:p14="http://schemas.microsoft.com/office/powerpoint/2010/main" val="1840726560"/>
+        <p14:creationId xmlns:p14="http://schemas.microsoft.com/office/powerpoint/2010/main" val="3231364282"/>
       </p:ext>
     </p:extLst>
   </p:cSld>
@@ -2338,7 +2476,13 @@
       </p:grpSpPr>
       <p:sp>
         <p:nvSpPr>
-          <p:cNvPr id="2" name="Title 1"/>
+          <p:cNvPr id="2" name="Title 1">
+            <a:extLst>
+              <a:ext uri="{FF2B5EF4-FFF2-40B4-BE49-F238E27FC236}">
+                <a16:creationId xmlns:a16="http://schemas.microsoft.com/office/drawing/2014/main" id="{840AB56C-5F5F-4DB3-97B4-A28B8147D36C}"/>
+              </a:ext>
+            </a:extLst>
+          </p:cNvPr>
           <p:cNvSpPr>
             <a:spLocks noGrp="1"/>
           </p:cNvSpPr>
@@ -2348,29 +2492,34 @@
         </p:nvSpPr>
         <p:spPr>
           <a:xfrm>
-            <a:off x="1792288" y="4800600"/>
-            <a:ext cx="5486400" cy="566738"/>
+            <a:off x="839788" y="457200"/>
+            <a:ext cx="3932237" cy="1600200"/>
           </a:xfrm>
         </p:spPr>
         <p:txBody>
           <a:bodyPr anchor="b"/>
           <a:lstStyle>
-            <a:lvl1pPr algn="l">
-              <a:defRPr sz="2000" b="1"/>
+            <a:lvl1pPr>
+              <a:defRPr sz="3200"/>
             </a:lvl1pPr>
           </a:lstStyle>
           <a:p>
             <a:r>
-              <a:rPr lang="en-US" smtClean="0"/>
+              <a:rPr lang="en-US"/>
               <a:t>Click to edit Master title style</a:t>
             </a:r>
-            <a:endParaRPr lang="en-US"/>
-          </a:p>
-        </p:txBody>
-      </p:sp>
-      <p:sp>
-        <p:nvSpPr>
-          <p:cNvPr id="3" name="Picture Placeholder 2"/>
+          </a:p>
+        </p:txBody>
+      </p:sp>
+      <p:sp>
+        <p:nvSpPr>
+          <p:cNvPr id="3" name="Picture Placeholder 2">
+            <a:extLst>
+              <a:ext uri="{FF2B5EF4-FFF2-40B4-BE49-F238E27FC236}">
+                <a16:creationId xmlns:a16="http://schemas.microsoft.com/office/drawing/2014/main" id="{9B7E51CC-1641-4094-ADC5-9BEC55C0108D}"/>
+              </a:ext>
+            </a:extLst>
+          </p:cNvPr>
           <p:cNvSpPr>
             <a:spLocks noGrp="1"/>
           </p:cNvSpPr>
@@ -2380,8 +2529,8 @@
         </p:nvSpPr>
         <p:spPr>
           <a:xfrm>
-            <a:off x="1792288" y="612775"/>
-            <a:ext cx="5486400" cy="4114800"/>
+            <a:off x="5183188" y="987425"/>
+            <a:ext cx="6172200" cy="4873625"/>
           </a:xfrm>
         </p:spPr>
         <p:txBody>
@@ -2431,7 +2580,13 @@
       </p:sp>
       <p:sp>
         <p:nvSpPr>
-          <p:cNvPr id="4" name="Text Placeholder 3"/>
+          <p:cNvPr id="4" name="Text Placeholder 3">
+            <a:extLst>
+              <a:ext uri="{FF2B5EF4-FFF2-40B4-BE49-F238E27FC236}">
+                <a16:creationId xmlns:a16="http://schemas.microsoft.com/office/drawing/2014/main" id="{E27D42CF-DEE4-424C-8571-AA8B20669908}"/>
+              </a:ext>
+            </a:extLst>
+          </p:cNvPr>
           <p:cNvSpPr>
             <a:spLocks noGrp="1"/>
           </p:cNvSpPr>
@@ -2441,8 +2596,8 @@
         </p:nvSpPr>
         <p:spPr>
           <a:xfrm>
-            <a:off x="1792288" y="5367338"/>
-            <a:ext cx="5486400" cy="804862"/>
+            <a:off x="839788" y="2057400"/>
+            <a:ext cx="3932237" cy="3811588"/>
           </a:xfrm>
         </p:spPr>
         <p:txBody>
@@ -2450,68 +2605,74 @@
           <a:lstStyle>
             <a:lvl1pPr marL="0" indent="0">
               <a:buNone/>
-              <a:defRPr sz="1400"/>
+              <a:defRPr sz="1600"/>
             </a:lvl1pPr>
             <a:lvl2pPr marL="457200" indent="0">
               <a:buNone/>
-              <a:defRPr sz="1200"/>
+              <a:defRPr sz="1400"/>
             </a:lvl2pPr>
             <a:lvl3pPr marL="914400" indent="0">
               <a:buNone/>
-              <a:defRPr sz="1000"/>
+              <a:defRPr sz="1200"/>
             </a:lvl3pPr>
             <a:lvl4pPr marL="1371600" indent="0">
               <a:buNone/>
-              <a:defRPr sz="900"/>
+              <a:defRPr sz="1000"/>
             </a:lvl4pPr>
             <a:lvl5pPr marL="1828800" indent="0">
               <a:buNone/>
-              <a:defRPr sz="900"/>
+              <a:defRPr sz="1000"/>
             </a:lvl5pPr>
             <a:lvl6pPr marL="2286000" indent="0">
               <a:buNone/>
-              <a:defRPr sz="900"/>
+              <a:defRPr sz="1000"/>
             </a:lvl6pPr>
             <a:lvl7pPr marL="2743200" indent="0">
               <a:buNone/>
-              <a:defRPr sz="900"/>
+              <a:defRPr sz="1000"/>
             </a:lvl7pPr>
             <a:lvl8pPr marL="3200400" indent="0">
               <a:buNone/>
-              <a:defRPr sz="900"/>
+              <a:defRPr sz="1000"/>
             </a:lvl8pPr>
             <a:lvl9pPr marL="3657600" indent="0">
               <a:buNone/>
-              <a:defRPr sz="900"/>
+              <a:defRPr sz="1000"/>
             </a:lvl9pPr>
           </a:lstStyle>
           <a:p>
             <a:pPr lvl="0"/>
             <a:r>
+              <a:rPr lang="en-US"/>
+              <a:t>Edit Master text styles</a:t>
+            </a:r>
+          </a:p>
+        </p:txBody>
+      </p:sp>
+      <p:sp>
+        <p:nvSpPr>
+          <p:cNvPr id="5" name="Date Placeholder 4">
+            <a:extLst>
+              <a:ext uri="{FF2B5EF4-FFF2-40B4-BE49-F238E27FC236}">
+                <a16:creationId xmlns:a16="http://schemas.microsoft.com/office/drawing/2014/main" id="{DF7F7EAA-3495-4E6F-96B7-3E00125DBF43}"/>
+              </a:ext>
+            </a:extLst>
+          </p:cNvPr>
+          <p:cNvSpPr>
+            <a:spLocks noGrp="1"/>
+          </p:cNvSpPr>
+          <p:nvPr>
+            <p:ph type="dt" sz="half" idx="10"/>
+          </p:nvPr>
+        </p:nvSpPr>
+        <p:spPr/>
+        <p:txBody>
+          <a:bodyPr/>
+          <a:lstStyle/>
+          <a:p>
+            <a:fld id="{B11CAE26-DC4B-40B0-AA71-79A794444606}" type="datetimeFigureOut">
               <a:rPr lang="en-US" smtClean="0"/>
-              <a:t>Click to edit Master text styles</a:t>
-            </a:r>
-          </a:p>
-        </p:txBody>
-      </p:sp>
-      <p:sp>
-        <p:nvSpPr>
-          <p:cNvPr id="5" name="Date Placeholder 4"/>
-          <p:cNvSpPr>
-            <a:spLocks noGrp="1"/>
-          </p:cNvSpPr>
-          <p:nvPr>
-            <p:ph type="dt" sz="half" idx="10"/>
-          </p:nvPr>
-        </p:nvSpPr>
-        <p:spPr/>
-        <p:txBody>
-          <a:bodyPr/>
-          <a:lstStyle/>
-          <a:p>
-            <a:fld id="{5BCAD085-E8A6-8845-BD4E-CB4CCA059FC4}" type="datetimeFigureOut">
-              <a:rPr lang="en-US" smtClean="0"/>
-              <a:t>1/27/13</a:t>
+              <a:t>3/2/2018</a:t>
             </a:fld>
             <a:endParaRPr lang="en-US"/>
           </a:p>
@@ -2519,7 +2680,13 @@
       </p:sp>
       <p:sp>
         <p:nvSpPr>
-          <p:cNvPr id="6" name="Footer Placeholder 5"/>
+          <p:cNvPr id="6" name="Footer Placeholder 5">
+            <a:extLst>
+              <a:ext uri="{FF2B5EF4-FFF2-40B4-BE49-F238E27FC236}">
+                <a16:creationId xmlns:a16="http://schemas.microsoft.com/office/drawing/2014/main" id="{57A995CF-649C-432C-8547-43BA416408A7}"/>
+              </a:ext>
+            </a:extLst>
+          </p:cNvPr>
           <p:cNvSpPr>
             <a:spLocks noGrp="1"/>
           </p:cNvSpPr>
@@ -2538,7 +2705,13 @@
       </p:sp>
       <p:sp>
         <p:nvSpPr>
-          <p:cNvPr id="7" name="Slide Number Placeholder 6"/>
+          <p:cNvPr id="7" name="Slide Number Placeholder 6">
+            <a:extLst>
+              <a:ext uri="{FF2B5EF4-FFF2-40B4-BE49-F238E27FC236}">
+                <a16:creationId xmlns:a16="http://schemas.microsoft.com/office/drawing/2014/main" id="{6AA6F419-4CBE-4898-80A4-81533F60D83F}"/>
+              </a:ext>
+            </a:extLst>
+          </p:cNvPr>
           <p:cNvSpPr>
             <a:spLocks noGrp="1"/>
           </p:cNvSpPr>
@@ -2551,7 +2724,7 @@
           <a:bodyPr/>
           <a:lstStyle/>
           <a:p>
-            <a:fld id="{C1FF6DA9-008F-8B48-92A6-B652298478BF}" type="slidenum">
+            <a:fld id="{5F02EBD8-602C-4319-9146-7430882F2051}" type="slidenum">
               <a:rPr lang="en-US" smtClean="0"/>
               <a:t>‹#›</a:t>
             </a:fld>
@@ -2562,7 +2735,7 @@
     </p:spTree>
     <p:extLst>
       <p:ext uri="{BB962C8B-B14F-4D97-AF65-F5344CB8AC3E}">
-        <p14:creationId xmlns:p14="http://schemas.microsoft.com/office/powerpoint/2010/main" val="3889236939"/>
+        <p14:creationId xmlns:p14="http://schemas.microsoft.com/office/powerpoint/2010/main" val="1413694148"/>
       </p:ext>
     </p:extLst>
   </p:cSld>
@@ -2596,7 +2769,13 @@
       </p:grpSpPr>
       <p:sp>
         <p:nvSpPr>
-          <p:cNvPr id="2" name="Title Placeholder 1"/>
+          <p:cNvPr id="2" name="Title Placeholder 1">
+            <a:extLst>
+              <a:ext uri="{FF2B5EF4-FFF2-40B4-BE49-F238E27FC236}">
+                <a16:creationId xmlns:a16="http://schemas.microsoft.com/office/drawing/2014/main" id="{2E5EBF2A-2FD2-4558-B692-E5C0D94B5BD6}"/>
+              </a:ext>
+            </a:extLst>
+          </p:cNvPr>
           <p:cNvSpPr>
             <a:spLocks noGrp="1"/>
           </p:cNvSpPr>
@@ -2606,8 +2785,8 @@
         </p:nvSpPr>
         <p:spPr>
           <a:xfrm>
-            <a:off x="457200" y="274638"/>
-            <a:ext cx="8229600" cy="1143000"/>
+            <a:off x="838200" y="365125"/>
+            <a:ext cx="10515600" cy="1325563"/>
           </a:xfrm>
           <a:prstGeom prst="rect">
             <a:avLst/>
@@ -2620,16 +2799,21 @@
           <a:lstStyle/>
           <a:p>
             <a:r>
-              <a:rPr lang="en-US" smtClean="0"/>
+              <a:rPr lang="en-US"/>
               <a:t>Click to edit Master title style</a:t>
             </a:r>
-            <a:endParaRPr lang="en-US"/>
-          </a:p>
-        </p:txBody>
-      </p:sp>
-      <p:sp>
-        <p:nvSpPr>
-          <p:cNvPr id="3" name="Text Placeholder 2"/>
+          </a:p>
+        </p:txBody>
+      </p:sp>
+      <p:sp>
+        <p:nvSpPr>
+          <p:cNvPr id="3" name="Text Placeholder 2">
+            <a:extLst>
+              <a:ext uri="{FF2B5EF4-FFF2-40B4-BE49-F238E27FC236}">
+                <a16:creationId xmlns:a16="http://schemas.microsoft.com/office/drawing/2014/main" id="{6D58F296-B256-4D5E-A5C4-665D6A5A4D58}"/>
+              </a:ext>
+            </a:extLst>
+          </p:cNvPr>
           <p:cNvSpPr>
             <a:spLocks noGrp="1"/>
           </p:cNvSpPr>
@@ -2639,8 +2823,8 @@
         </p:nvSpPr>
         <p:spPr>
           <a:xfrm>
-            <a:off x="457200" y="1600200"/>
-            <a:ext cx="8229600" cy="4525963"/>
+            <a:off x="838200" y="1825625"/>
+            <a:ext cx="10515600" cy="4351338"/>
           </a:xfrm>
           <a:prstGeom prst="rect">
             <a:avLst/>
@@ -2654,44 +2838,49 @@
           <a:p>
             <a:pPr lvl="0"/>
             <a:r>
-              <a:rPr lang="en-US" smtClean="0"/>
-              <a:t>Click to edit Master text styles</a:t>
+              <a:rPr lang="en-US"/>
+              <a:t>Edit Master text styles</a:t>
             </a:r>
           </a:p>
           <a:p>
             <a:pPr lvl="1"/>
             <a:r>
-              <a:rPr lang="en-US" smtClean="0"/>
+              <a:rPr lang="en-US"/>
               <a:t>Second level</a:t>
             </a:r>
           </a:p>
           <a:p>
             <a:pPr lvl="2"/>
             <a:r>
-              <a:rPr lang="en-US" smtClean="0"/>
+              <a:rPr lang="en-US"/>
               <a:t>Third level</a:t>
             </a:r>
           </a:p>
           <a:p>
             <a:pPr lvl="3"/>
             <a:r>
-              <a:rPr lang="en-US" smtClean="0"/>
+              <a:rPr lang="en-US"/>
               <a:t>Fourth level</a:t>
             </a:r>
           </a:p>
           <a:p>
             <a:pPr lvl="4"/>
             <a:r>
-              <a:rPr lang="en-US" smtClean="0"/>
+              <a:rPr lang="en-US"/>
               <a:t>Fifth level</a:t>
             </a:r>
-            <a:endParaRPr lang="en-US"/>
-          </a:p>
-        </p:txBody>
-      </p:sp>
-      <p:sp>
-        <p:nvSpPr>
-          <p:cNvPr id="4" name="Date Placeholder 3"/>
+          </a:p>
+        </p:txBody>
+      </p:sp>
+      <p:sp>
+        <p:nvSpPr>
+          <p:cNvPr id="4" name="Date Placeholder 3">
+            <a:extLst>
+              <a:ext uri="{FF2B5EF4-FFF2-40B4-BE49-F238E27FC236}">
+                <a16:creationId xmlns:a16="http://schemas.microsoft.com/office/drawing/2014/main" id="{2C60B1B1-841C-436C-9365-E1AD2CA78AF4}"/>
+              </a:ext>
+            </a:extLst>
+          </p:cNvPr>
           <p:cNvSpPr>
             <a:spLocks noGrp="1"/>
           </p:cNvSpPr>
@@ -2701,8 +2890,8 @@
         </p:nvSpPr>
         <p:spPr>
           <a:xfrm>
-            <a:off x="457200" y="6356350"/>
-            <a:ext cx="2133600" cy="365125"/>
+            <a:off x="838200" y="6356350"/>
+            <a:ext cx="2743200" cy="365125"/>
           </a:xfrm>
           <a:prstGeom prst="rect">
             <a:avLst/>
@@ -2722,9 +2911,9 @@
             </a:lvl1pPr>
           </a:lstStyle>
           <a:p>
-            <a:fld id="{5BCAD085-E8A6-8845-BD4E-CB4CCA059FC4}" type="datetimeFigureOut">
+            <a:fld id="{B11CAE26-DC4B-40B0-AA71-79A794444606}" type="datetimeFigureOut">
               <a:rPr lang="en-US" smtClean="0"/>
-              <a:t>1/27/13</a:t>
+              <a:t>3/2/2018</a:t>
             </a:fld>
             <a:endParaRPr lang="en-US"/>
           </a:p>
@@ -2732,7 +2921,13 @@
       </p:sp>
       <p:sp>
         <p:nvSpPr>
-          <p:cNvPr id="5" name="Footer Placeholder 4"/>
+          <p:cNvPr id="5" name="Footer Placeholder 4">
+            <a:extLst>
+              <a:ext uri="{FF2B5EF4-FFF2-40B4-BE49-F238E27FC236}">
+                <a16:creationId xmlns:a16="http://schemas.microsoft.com/office/drawing/2014/main" id="{4D14CCFE-5FCE-4CCA-9123-44824D0A60CD}"/>
+              </a:ext>
+            </a:extLst>
+          </p:cNvPr>
           <p:cNvSpPr>
             <a:spLocks noGrp="1"/>
           </p:cNvSpPr>
@@ -2742,8 +2937,8 @@
         </p:nvSpPr>
         <p:spPr>
           <a:xfrm>
-            <a:off x="3124200" y="6356350"/>
-            <a:ext cx="2895600" cy="365125"/>
+            <a:off x="4038600" y="6356350"/>
+            <a:ext cx="4114800" cy="365125"/>
           </a:xfrm>
           <a:prstGeom prst="rect">
             <a:avLst/>
@@ -2769,7 +2964,13 @@
       </p:sp>
       <p:sp>
         <p:nvSpPr>
-          <p:cNvPr id="6" name="Slide Number Placeholder 5"/>
+          <p:cNvPr id="6" name="Slide Number Placeholder 5">
+            <a:extLst>
+              <a:ext uri="{FF2B5EF4-FFF2-40B4-BE49-F238E27FC236}">
+                <a16:creationId xmlns:a16="http://schemas.microsoft.com/office/drawing/2014/main" id="{77FEA6B8-B920-4FC9-A8EA-36269643498C}"/>
+              </a:ext>
+            </a:extLst>
+          </p:cNvPr>
           <p:cNvSpPr>
             <a:spLocks noGrp="1"/>
           </p:cNvSpPr>
@@ -2779,8 +2980,8 @@
         </p:nvSpPr>
         <p:spPr>
           <a:xfrm>
-            <a:off x="6553200" y="6356350"/>
-            <a:ext cx="2133600" cy="365125"/>
+            <a:off x="8610600" y="6356350"/>
+            <a:ext cx="2743200" cy="365125"/>
           </a:xfrm>
           <a:prstGeom prst="rect">
             <a:avLst/>
@@ -2800,7 +3001,7 @@
             </a:lvl1pPr>
           </a:lstStyle>
           <a:p>
-            <a:fld id="{C1FF6DA9-008F-8B48-92A6-B652298478BF}" type="slidenum">
+            <a:fld id="{5F02EBD8-602C-4319-9146-7430882F2051}" type="slidenum">
               <a:rPr lang="en-US" smtClean="0"/>
               <a:t>‹#›</a:t>
             </a:fld>
@@ -2811,7 +3012,7 @@
     </p:spTree>
     <p:extLst>
       <p:ext uri="{BB962C8B-B14F-4D97-AF65-F5344CB8AC3E}">
-        <p14:creationId xmlns:p14="http://schemas.microsoft.com/office/powerpoint/2010/main" val="2209977519"/>
+        <p14:creationId xmlns:p14="http://schemas.microsoft.com/office/powerpoint/2010/main" val="2654343590"/>
       </p:ext>
     </p:extLst>
   </p:cSld>
@@ -2831,7 +3032,10 @@
   </p:sldLayoutIdLst>
   <p:txStyles>
     <p:titleStyle>
-      <a:lvl1pPr algn="ctr" defTabSz="457200" rtl="0" eaLnBrk="1" latinLnBrk="0" hangingPunct="1">
+      <a:lvl1pPr algn="l" defTabSz="914400" rtl="0" eaLnBrk="1" latinLnBrk="0" hangingPunct="1">
+        <a:lnSpc>
+          <a:spcPct val="90000"/>
+        </a:lnSpc>
         <a:spcBef>
           <a:spcPct val="0"/>
         </a:spcBef>
@@ -2847,13 +3051,16 @@
       </a:lvl1pPr>
     </p:titleStyle>
     <p:bodyStyle>
-      <a:lvl1pPr marL="342900" indent="-342900" algn="l" defTabSz="457200" rtl="0" eaLnBrk="1" latinLnBrk="0" hangingPunct="1">
+      <a:lvl1pPr marL="228600" indent="-228600" algn="l" defTabSz="914400" rtl="0" eaLnBrk="1" latinLnBrk="0" hangingPunct="1">
+        <a:lnSpc>
+          <a:spcPct val="90000"/>
+        </a:lnSpc>
         <a:spcBef>
-          <a:spcPct val="20000"/>
+          <a:spcPts val="1000"/>
         </a:spcBef>
-        <a:buFont typeface="Arial"/>
+        <a:buFont typeface="Arial" panose="020B0604020202020204" pitchFamily="34" charset="0"/>
         <a:buChar char="•"/>
-        <a:defRPr sz="3200" kern="1200">
+        <a:defRPr sz="2800" kern="1200">
           <a:solidFill>
             <a:schemeClr val="tx1"/>
           </a:solidFill>
@@ -2862,26 +3069,14 @@
           <a:cs typeface="+mn-cs"/>
         </a:defRPr>
       </a:lvl1pPr>
-      <a:lvl2pPr marL="742950" indent="-285750" algn="l" defTabSz="457200" rtl="0" eaLnBrk="1" latinLnBrk="0" hangingPunct="1">
+      <a:lvl2pPr marL="685800" indent="-228600" algn="l" defTabSz="914400" rtl="0" eaLnBrk="1" latinLnBrk="0" hangingPunct="1">
+        <a:lnSpc>
+          <a:spcPct val="90000"/>
+        </a:lnSpc>
         <a:spcBef>
-          <a:spcPct val="20000"/>
+          <a:spcPts val="500"/>
         </a:spcBef>
-        <a:buFont typeface="Arial"/>
-        <a:buChar char="–"/>
-        <a:defRPr sz="2800" kern="1200">
-          <a:solidFill>
-            <a:schemeClr val="tx1"/>
-          </a:solidFill>
-          <a:latin typeface="+mn-lt"/>
-          <a:ea typeface="+mn-ea"/>
-          <a:cs typeface="+mn-cs"/>
-        </a:defRPr>
-      </a:lvl2pPr>
-      <a:lvl3pPr marL="1143000" indent="-228600" algn="l" defTabSz="457200" rtl="0" eaLnBrk="1" latinLnBrk="0" hangingPunct="1">
-        <a:spcBef>
-          <a:spcPct val="20000"/>
-        </a:spcBef>
-        <a:buFont typeface="Arial"/>
+        <a:buFont typeface="Arial" panose="020B0604020202020204" pitchFamily="34" charset="0"/>
         <a:buChar char="•"/>
         <a:defRPr sz="2400" kern="1200">
           <a:solidFill>
@@ -2891,42 +3086,15 @@
           <a:ea typeface="+mn-ea"/>
           <a:cs typeface="+mn-cs"/>
         </a:defRPr>
-      </a:lvl3pPr>
-      <a:lvl4pPr marL="1600200" indent="-228600" algn="l" defTabSz="457200" rtl="0" eaLnBrk="1" latinLnBrk="0" hangingPunct="1">
+      </a:lvl2pPr>
+      <a:lvl3pPr marL="1143000" indent="-228600" algn="l" defTabSz="914400" rtl="0" eaLnBrk="1" latinLnBrk="0" hangingPunct="1">
+        <a:lnSpc>
+          <a:spcPct val="90000"/>
+        </a:lnSpc>
         <a:spcBef>
-          <a:spcPct val="20000"/>
+          <a:spcPts val="500"/>
         </a:spcBef>
-        <a:buFont typeface="Arial"/>
-        <a:buChar char="–"/>
-        <a:defRPr sz="2000" kern="1200">
-          <a:solidFill>
-            <a:schemeClr val="tx1"/>
-          </a:solidFill>
-          <a:latin typeface="+mn-lt"/>
-          <a:ea typeface="+mn-ea"/>
-          <a:cs typeface="+mn-cs"/>
-        </a:defRPr>
-      </a:lvl4pPr>
-      <a:lvl5pPr marL="2057400" indent="-228600" algn="l" defTabSz="457200" rtl="0" eaLnBrk="1" latinLnBrk="0" hangingPunct="1">
-        <a:spcBef>
-          <a:spcPct val="20000"/>
-        </a:spcBef>
-        <a:buFont typeface="Arial"/>
-        <a:buChar char="»"/>
-        <a:defRPr sz="2000" kern="1200">
-          <a:solidFill>
-            <a:schemeClr val="tx1"/>
-          </a:solidFill>
-          <a:latin typeface="+mn-lt"/>
-          <a:ea typeface="+mn-ea"/>
-          <a:cs typeface="+mn-cs"/>
-        </a:defRPr>
-      </a:lvl5pPr>
-      <a:lvl6pPr marL="2514600" indent="-228600" algn="l" defTabSz="457200" rtl="0" eaLnBrk="1" latinLnBrk="0" hangingPunct="1">
-        <a:spcBef>
-          <a:spcPct val="20000"/>
-        </a:spcBef>
-        <a:buFont typeface="Arial"/>
+        <a:buFont typeface="Arial" panose="020B0604020202020204" pitchFamily="34" charset="0"/>
         <a:buChar char="•"/>
         <a:defRPr sz="2000" kern="1200">
           <a:solidFill>
@@ -2936,14 +3104,71 @@
           <a:ea typeface="+mn-ea"/>
           <a:cs typeface="+mn-cs"/>
         </a:defRPr>
+      </a:lvl3pPr>
+      <a:lvl4pPr marL="1600200" indent="-228600" algn="l" defTabSz="914400" rtl="0" eaLnBrk="1" latinLnBrk="0" hangingPunct="1">
+        <a:lnSpc>
+          <a:spcPct val="90000"/>
+        </a:lnSpc>
+        <a:spcBef>
+          <a:spcPts val="500"/>
+        </a:spcBef>
+        <a:buFont typeface="Arial" panose="020B0604020202020204" pitchFamily="34" charset="0"/>
+        <a:buChar char="•"/>
+        <a:defRPr sz="1800" kern="1200">
+          <a:solidFill>
+            <a:schemeClr val="tx1"/>
+          </a:solidFill>
+          <a:latin typeface="+mn-lt"/>
+          <a:ea typeface="+mn-ea"/>
+          <a:cs typeface="+mn-cs"/>
+        </a:defRPr>
+      </a:lvl4pPr>
+      <a:lvl5pPr marL="2057400" indent="-228600" algn="l" defTabSz="914400" rtl="0" eaLnBrk="1" latinLnBrk="0" hangingPunct="1">
+        <a:lnSpc>
+          <a:spcPct val="90000"/>
+        </a:lnSpc>
+        <a:spcBef>
+          <a:spcPts val="500"/>
+        </a:spcBef>
+        <a:buFont typeface="Arial" panose="020B0604020202020204" pitchFamily="34" charset="0"/>
+        <a:buChar char="•"/>
+        <a:defRPr sz="1800" kern="1200">
+          <a:solidFill>
+            <a:schemeClr val="tx1"/>
+          </a:solidFill>
+          <a:latin typeface="+mn-lt"/>
+          <a:ea typeface="+mn-ea"/>
+          <a:cs typeface="+mn-cs"/>
+        </a:defRPr>
+      </a:lvl5pPr>
+      <a:lvl6pPr marL="2514600" indent="-228600" algn="l" defTabSz="914400" rtl="0" eaLnBrk="1" latinLnBrk="0" hangingPunct="1">
+        <a:lnSpc>
+          <a:spcPct val="90000"/>
+        </a:lnSpc>
+        <a:spcBef>
+          <a:spcPts val="500"/>
+        </a:spcBef>
+        <a:buFont typeface="Arial" panose="020B0604020202020204" pitchFamily="34" charset="0"/>
+        <a:buChar char="•"/>
+        <a:defRPr sz="1800" kern="1200">
+          <a:solidFill>
+            <a:schemeClr val="tx1"/>
+          </a:solidFill>
+          <a:latin typeface="+mn-lt"/>
+          <a:ea typeface="+mn-ea"/>
+          <a:cs typeface="+mn-cs"/>
+        </a:defRPr>
       </a:lvl6pPr>
-      <a:lvl7pPr marL="2971800" indent="-228600" algn="l" defTabSz="457200" rtl="0" eaLnBrk="1" latinLnBrk="0" hangingPunct="1">
+      <a:lvl7pPr marL="2971800" indent="-228600" algn="l" defTabSz="914400" rtl="0" eaLnBrk="1" latinLnBrk="0" hangingPunct="1">
+        <a:lnSpc>
+          <a:spcPct val="90000"/>
+        </a:lnSpc>
         <a:spcBef>
-          <a:spcPct val="20000"/>
+          <a:spcPts val="500"/>
         </a:spcBef>
-        <a:buFont typeface="Arial"/>
+        <a:buFont typeface="Arial" panose="020B0604020202020204" pitchFamily="34" charset="0"/>
         <a:buChar char="•"/>
-        <a:defRPr sz="2000" kern="1200">
+        <a:defRPr sz="1800" kern="1200">
           <a:solidFill>
             <a:schemeClr val="tx1"/>
           </a:solidFill>
@@ -2952,13 +3177,16 @@
           <a:cs typeface="+mn-cs"/>
         </a:defRPr>
       </a:lvl7pPr>
-      <a:lvl8pPr marL="3429000" indent="-228600" algn="l" defTabSz="457200" rtl="0" eaLnBrk="1" latinLnBrk="0" hangingPunct="1">
+      <a:lvl8pPr marL="3429000" indent="-228600" algn="l" defTabSz="914400" rtl="0" eaLnBrk="1" latinLnBrk="0" hangingPunct="1">
+        <a:lnSpc>
+          <a:spcPct val="90000"/>
+        </a:lnSpc>
         <a:spcBef>
-          <a:spcPct val="20000"/>
+          <a:spcPts val="500"/>
         </a:spcBef>
-        <a:buFont typeface="Arial"/>
+        <a:buFont typeface="Arial" panose="020B0604020202020204" pitchFamily="34" charset="0"/>
         <a:buChar char="•"/>
-        <a:defRPr sz="2000" kern="1200">
+        <a:defRPr sz="1800" kern="1200">
           <a:solidFill>
             <a:schemeClr val="tx1"/>
           </a:solidFill>
@@ -2967,13 +3195,16 @@
           <a:cs typeface="+mn-cs"/>
         </a:defRPr>
       </a:lvl8pPr>
-      <a:lvl9pPr marL="3886200" indent="-228600" algn="l" defTabSz="457200" rtl="0" eaLnBrk="1" latinLnBrk="0" hangingPunct="1">
+      <a:lvl9pPr marL="3886200" indent="-228600" algn="l" defTabSz="914400" rtl="0" eaLnBrk="1" latinLnBrk="0" hangingPunct="1">
+        <a:lnSpc>
+          <a:spcPct val="90000"/>
+        </a:lnSpc>
         <a:spcBef>
-          <a:spcPct val="20000"/>
+          <a:spcPts val="500"/>
         </a:spcBef>
-        <a:buFont typeface="Arial"/>
+        <a:buFont typeface="Arial" panose="020B0604020202020204" pitchFamily="34" charset="0"/>
         <a:buChar char="•"/>
-        <a:defRPr sz="2000" kern="1200">
+        <a:defRPr sz="1800" kern="1200">
           <a:solidFill>
             <a:schemeClr val="tx1"/>
           </a:solidFill>
@@ -2987,7 +3218,7 @@
       <a:defPPr>
         <a:defRPr lang="en-US"/>
       </a:defPPr>
-      <a:lvl1pPr marL="0" algn="l" defTabSz="457200" rtl="0" eaLnBrk="1" latinLnBrk="0" hangingPunct="1">
+      <a:lvl1pPr marL="0" algn="l" defTabSz="914400" rtl="0" eaLnBrk="1" latinLnBrk="0" hangingPunct="1">
         <a:defRPr sz="1800" kern="1200">
           <a:solidFill>
             <a:schemeClr val="tx1"/>
@@ -2997,7 +3228,7 @@
           <a:cs typeface="+mn-cs"/>
         </a:defRPr>
       </a:lvl1pPr>
-      <a:lvl2pPr marL="457200" algn="l" defTabSz="457200" rtl="0" eaLnBrk="1" latinLnBrk="0" hangingPunct="1">
+      <a:lvl2pPr marL="457200" algn="l" defTabSz="914400" rtl="0" eaLnBrk="1" latinLnBrk="0" hangingPunct="1">
         <a:defRPr sz="1800" kern="1200">
           <a:solidFill>
             <a:schemeClr val="tx1"/>
@@ -3007,7 +3238,7 @@
           <a:cs typeface="+mn-cs"/>
         </a:defRPr>
       </a:lvl2pPr>
-      <a:lvl3pPr marL="914400" algn="l" defTabSz="457200" rtl="0" eaLnBrk="1" latinLnBrk="0" hangingPunct="1">
+      <a:lvl3pPr marL="914400" algn="l" defTabSz="914400" rtl="0" eaLnBrk="1" latinLnBrk="0" hangingPunct="1">
         <a:defRPr sz="1800" kern="1200">
           <a:solidFill>
             <a:schemeClr val="tx1"/>
@@ -3017,7 +3248,7 @@
           <a:cs typeface="+mn-cs"/>
         </a:defRPr>
       </a:lvl3pPr>
-      <a:lvl4pPr marL="1371600" algn="l" defTabSz="457200" rtl="0" eaLnBrk="1" latinLnBrk="0" hangingPunct="1">
+      <a:lvl4pPr marL="1371600" algn="l" defTabSz="914400" rtl="0" eaLnBrk="1" latinLnBrk="0" hangingPunct="1">
         <a:defRPr sz="1800" kern="1200">
           <a:solidFill>
             <a:schemeClr val="tx1"/>
@@ -3027,7 +3258,7 @@
           <a:cs typeface="+mn-cs"/>
         </a:defRPr>
       </a:lvl4pPr>
-      <a:lvl5pPr marL="1828800" algn="l" defTabSz="457200" rtl="0" eaLnBrk="1" latinLnBrk="0" hangingPunct="1">
+      <a:lvl5pPr marL="1828800" algn="l" defTabSz="914400" rtl="0" eaLnBrk="1" latinLnBrk="0" hangingPunct="1">
         <a:defRPr sz="1800" kern="1200">
           <a:solidFill>
             <a:schemeClr val="tx1"/>
@@ -3037,7 +3268,7 @@
           <a:cs typeface="+mn-cs"/>
         </a:defRPr>
       </a:lvl5pPr>
-      <a:lvl6pPr marL="2286000" algn="l" defTabSz="457200" rtl="0" eaLnBrk="1" latinLnBrk="0" hangingPunct="1">
+      <a:lvl6pPr marL="2286000" algn="l" defTabSz="914400" rtl="0" eaLnBrk="1" latinLnBrk="0" hangingPunct="1">
         <a:defRPr sz="1800" kern="1200">
           <a:solidFill>
             <a:schemeClr val="tx1"/>
@@ -3047,7 +3278,7 @@
           <a:cs typeface="+mn-cs"/>
         </a:defRPr>
       </a:lvl6pPr>
-      <a:lvl7pPr marL="2743200" algn="l" defTabSz="457200" rtl="0" eaLnBrk="1" latinLnBrk="0" hangingPunct="1">
+      <a:lvl7pPr marL="2743200" algn="l" defTabSz="914400" rtl="0" eaLnBrk="1" latinLnBrk="0" hangingPunct="1">
         <a:defRPr sz="1800" kern="1200">
           <a:solidFill>
             <a:schemeClr val="tx1"/>
@@ -3057,7 +3288,7 @@
           <a:cs typeface="+mn-cs"/>
         </a:defRPr>
       </a:lvl7pPr>
-      <a:lvl8pPr marL="3200400" algn="l" defTabSz="457200" rtl="0" eaLnBrk="1" latinLnBrk="0" hangingPunct="1">
+      <a:lvl8pPr marL="3200400" algn="l" defTabSz="914400" rtl="0" eaLnBrk="1" latinLnBrk="0" hangingPunct="1">
         <a:defRPr sz="1800" kern="1200">
           <a:solidFill>
             <a:schemeClr val="tx1"/>
@@ -3067,7 +3298,7 @@
           <a:cs typeface="+mn-cs"/>
         </a:defRPr>
       </a:lvl8pPr>
-      <a:lvl9pPr marL="3657600" algn="l" defTabSz="457200" rtl="0" eaLnBrk="1" latinLnBrk="0" hangingPunct="1">
+      <a:lvl9pPr marL="3657600" algn="l" defTabSz="914400" rtl="0" eaLnBrk="1" latinLnBrk="0" hangingPunct="1">
         <a:defRPr sz="1800" kern="1200">
           <a:solidFill>
             <a:schemeClr val="tx1"/>
@@ -3094,24 +3325,62 @@
       <p:grpSpPr/>
       <p:sp>
         <p:nvSpPr>
-          <p:cNvPr id="2" name="Rectangle 1"/>
+          <p:cNvPr id="2" name="Title 1"/>
+          <p:cNvSpPr>
+            <a:spLocks noGrp="1"/>
+          </p:cNvSpPr>
+          <p:nvPr>
+            <p:ph type="ctrTitle"/>
+          </p:nvPr>
+        </p:nvSpPr>
+        <p:spPr/>
+        <p:txBody>
+          <a:bodyPr/>
+          <a:lstStyle/>
+          <a:p/>
+        </p:txBody>
+      </p:sp>
+      <p:sp>
+        <p:nvSpPr>
+          <p:cNvPr id="3" name="Subtitle 2"/>
+          <p:cNvSpPr>
+            <a:spLocks noGrp="1"/>
+          </p:cNvSpPr>
+          <p:nvPr>
+            <p:ph type="subTitle" idx="1"/>
+          </p:nvPr>
+        </p:nvSpPr>
+        <p:spPr/>
+        <p:txBody>
+          <a:bodyPr/>
+          <a:lstStyle/>
+          <a:p/>
+        </p:txBody>
+      </p:sp>
+      <p:sp>
+        <p:nvSpPr>
+          <p:cNvPr id="4" name="Rectangle 3"/>
           <p:cNvSpPr/>
           <p:nvPr/>
         </p:nvSpPr>
         <p:spPr>
           <a:xfrm>
             <a:off x="0" y="0"/>
-            <a:ext cx="12192000" cy="457200"/>
+            <a:ext cx="12191969" cy="457200"/>
           </a:xfrm>
           <a:prstGeom prst="rect">
             <a:avLst/>
           </a:prstGeom>
+          <a:noFill/>
+          <a:ln>
+            <a:noFill/>
+          </a:ln>
         </p:spPr>
         <p:style>
           <a:lnRef idx="1">
             <a:schemeClr val="accent1"/>
           </a:lnRef>
-          <a:fillRef idx="3">
+          <a:fillRef idx="1">
             <a:schemeClr val="accent1"/>
           </a:fillRef>
           <a:effectRef idx="2">
@@ -3131,24 +3400,28 @@
       </p:sp>
       <p:sp>
         <p:nvSpPr>
-          <p:cNvPr id="3" name="Rectangle 2"/>
+          <p:cNvPr id="5" name="Rectangle 4"/>
           <p:cNvSpPr/>
           <p:nvPr/>
         </p:nvSpPr>
         <p:spPr>
           <a:xfrm>
             <a:off x="0" y="457200"/>
-            <a:ext cx="12192000" cy="0"/>
+            <a:ext cx="12191969" cy="0"/>
           </a:xfrm>
           <a:prstGeom prst="rect">
             <a:avLst/>
           </a:prstGeom>
+          <a:noFill/>
+          <a:ln>
+            <a:noFill/>
+          </a:ln>
         </p:spPr>
         <p:style>
           <a:lnRef idx="1">
             <a:schemeClr val="accent1"/>
           </a:lnRef>
-          <a:fillRef idx="3">
+          <a:fillRef idx="1">
             <a:schemeClr val="accent1"/>
           </a:fillRef>
           <a:effectRef idx="2">
@@ -3168,24 +3441,28 @@
       </p:sp>
       <p:sp>
         <p:nvSpPr>
-          <p:cNvPr id="4" name="Rectangle 3"/>
+          <p:cNvPr id="6" name="Rectangle 5"/>
           <p:cNvSpPr/>
           <p:nvPr/>
         </p:nvSpPr>
         <p:spPr>
           <a:xfrm>
-            <a:off x="0" y="4122738"/>
-            <a:ext cx="12192000" cy="457200"/>
+            <a:off x="0" y="4122755"/>
+            <a:ext cx="12191969" cy="457200"/>
           </a:xfrm>
           <a:prstGeom prst="rect">
             <a:avLst/>
           </a:prstGeom>
+          <a:noFill/>
+          <a:ln>
+            <a:noFill/>
+          </a:ln>
         </p:spPr>
         <p:style>
           <a:lnRef idx="1">
             <a:schemeClr val="accent1"/>
           </a:lnRef>
-          <a:fillRef idx="3">
+          <a:fillRef idx="1">
             <a:schemeClr val="accent1"/>
           </a:fillRef>
           <a:effectRef idx="2">
@@ -3205,24 +3482,28 @@
       </p:sp>
       <p:sp>
         <p:nvSpPr>
-          <p:cNvPr id="5" name="Rectangle 4"/>
+          <p:cNvPr id="7" name="Rectangle 6"/>
           <p:cNvSpPr/>
           <p:nvPr/>
         </p:nvSpPr>
         <p:spPr>
           <a:xfrm>
-            <a:off x="0" y="4579938"/>
-            <a:ext cx="12192000" cy="0"/>
+            <a:off x="0" y="4579955"/>
+            <a:ext cx="12191969" cy="0"/>
           </a:xfrm>
           <a:prstGeom prst="rect">
             <a:avLst/>
           </a:prstGeom>
+          <a:noFill/>
+          <a:ln>
+            <a:noFill/>
+          </a:ln>
         </p:spPr>
         <p:style>
           <a:lnRef idx="1">
             <a:schemeClr val="accent1"/>
           </a:lnRef>
-          <a:fillRef idx="3">
+          <a:fillRef idx="1">
             <a:schemeClr val="accent1"/>
           </a:fillRef>
           <a:effectRef idx="2">
@@ -3242,24 +3523,28 @@
       </p:sp>
       <p:sp>
         <p:nvSpPr>
-          <p:cNvPr id="6" name="Rectangle 5"/>
+          <p:cNvPr id="8" name="Rectangle 7"/>
           <p:cNvSpPr/>
           <p:nvPr/>
         </p:nvSpPr>
         <p:spPr>
           <a:xfrm>
-            <a:off x="0" y="7954963"/>
-            <a:ext cx="12192000" cy="457200"/>
+            <a:off x="0" y="7955005"/>
+            <a:ext cx="12191969" cy="457200"/>
           </a:xfrm>
           <a:prstGeom prst="rect">
             <a:avLst/>
           </a:prstGeom>
+          <a:noFill/>
+          <a:ln>
+            <a:noFill/>
+          </a:ln>
         </p:spPr>
         <p:style>
           <a:lnRef idx="1">
             <a:schemeClr val="accent1"/>
           </a:lnRef>
-          <a:fillRef idx="3">
+          <a:fillRef idx="1">
             <a:schemeClr val="accent1"/>
           </a:fillRef>
           <a:effectRef idx="2">
@@ -3279,78 +3564,118 @@
       </p:sp>
       <p:sp>
         <p:nvSpPr>
-          <p:cNvPr id="7" name="Rectangle 6"/>
-          <p:cNvSpPr/>
+          <p:cNvPr id="9" name="TextBox 8"/>
+          <p:cNvSpPr txBox="1"/>
           <p:nvPr/>
         </p:nvSpPr>
         <p:spPr>
           <a:xfrm>
-            <a:off x="1828800" y="2496562"/>
-            <a:ext cx="7580859" cy="2585323"/>
+            <a:off x="1828800" y="2496586"/>
+            <a:ext cx="7580833" cy="2585283"/>
           </a:xfrm>
           <a:prstGeom prst="rect">
             <a:avLst/>
           </a:prstGeom>
+          <a:noFill/>
         </p:spPr>
-        <p:style>
-          <a:lnRef idx="1">
-            <a:schemeClr val="accent1"/>
-          </a:lnRef>
-          <a:fillRef idx="3">
-            <a:schemeClr val="accent1"/>
-          </a:fillRef>
-          <a:effectRef idx="2">
-            <a:schemeClr val="accent1"/>
-          </a:effectRef>
-          <a:fontRef idx="minor">
-            <a:schemeClr val="lt1"/>
-          </a:fontRef>
-        </p:style>
-        <p:txBody>
-          <a:bodyPr rtlCol="0" anchor="ctr"/>
-          <a:lstStyle/>
-          <a:p>
-            <a:r>
-              <a:t>If you going to use this package, please send an Email to:   tom@irvinemail.orgGo to:https://vibrationdata.wordpress.com/Download &amp; extract the GUI package as shown on the next slide</a:t>
-            </a:r>
-          </a:p>
-        </p:txBody>
-      </p:sp>
-      <p:sp>
-        <p:nvSpPr>
-          <p:cNvPr id="8" name="Rectangle 7"/>
-          <p:cNvSpPr/>
+        <p:txBody>
+          <a:bodyPr wrap="square">
+            <a:spAutoFit/>
+          </a:bodyPr>
+          <a:lstStyle/>
+          <a:p>
+            <a:pPr lvl="0">
+              <a:buNone/>
+            </a:pPr>
+            <a:r>
+              <a:t>If you going to use this package, please send an Email to:   tom@irvinemail.org</a:t>
+            </a:r>
+          </a:p>
+          <a:p>
+            <a:pPr lvl="0">
+              <a:buNone/>
+            </a:pPr>
+            <a:r>
+              <a:t>Go </a:t>
+            </a:r>
+            <a:r>
+              <a:t>to:</a:t>
+            </a:r>
+          </a:p>
+          <a:p>
+            <a:pPr lvl="0">
+              <a:buNone/>
+            </a:pPr>
+            <a:r>
+              <a:rPr>
+                <a:hlinkClick r:id="rId2"/>
+              </a:rPr>
+              <a:t>https://vibrationdata.wordpress.com/</a:t>
+            </a:r>
+          </a:p>
+          <a:p>
+            <a:pPr lvl="0">
+              <a:buNone/>
+            </a:pPr>
+            <a:r>
+              <a:t>Download &amp; extract the GUI package as shown on the next slide</a:t>
+            </a:r>
+          </a:p>
+        </p:txBody>
+      </p:sp>
+      <p:sp>
+        <p:nvSpPr>
+          <p:cNvPr id="10" name="TextBox 9"/>
+          <p:cNvSpPr txBox="1"/>
           <p:nvPr/>
         </p:nvSpPr>
         <p:spPr>
           <a:xfrm>
-            <a:off x="2437959" y="1061383"/>
-            <a:ext cx="5911562" cy="830997"/>
+            <a:off x="2437973" y="1061344"/>
+            <a:ext cx="5911596" cy="831006"/>
           </a:xfrm>
           <a:prstGeom prst="rect">
             <a:avLst/>
           </a:prstGeom>
+          <a:noFill/>
         </p:spPr>
-        <p:style>
-          <a:lnRef idx="1">
-            <a:schemeClr val="accent1"/>
-          </a:lnRef>
-          <a:fillRef idx="3">
-            <a:schemeClr val="accent1"/>
-          </a:fillRef>
-          <a:effectRef idx="2">
-            <a:schemeClr val="accent1"/>
-          </a:effectRef>
-          <a:fontRef idx="minor">
-            <a:schemeClr val="lt1"/>
-          </a:fontRef>
-        </p:style>
-        <p:txBody>
-          <a:bodyPr rtlCol="0" anchor="ctr"/>
-          <a:lstStyle/>
-          <a:p>
-            <a:r>
-              <a:t>Download Vibration GUIby Tom Irvine</a:t>
+        <p:txBody>
+          <a:bodyPr wrap="square">
+            <a:spAutoFit/>
+          </a:bodyPr>
+          <a:lstStyle/>
+          <a:p>
+            <a:pPr lvl="0" algn="ctr">
+              <a:buNone/>
+            </a:pPr>
+            <a:r>
+              <a:rPr sz="2400">
+                <a:solidFill>
+                  <a:schemeClr val="accent5"/>
+                </a:solidFill>
+              </a:rPr>
+              <a:t>Download Vibration GUI</a:t>
+            </a:r>
+          </a:p>
+          <a:p>
+            <a:pPr lvl="0" algn="ctr">
+              <a:buNone/>
+            </a:pPr>
+            <a:r>
+              <a:rPr sz="2400">
+                <a:solidFill>
+                  <a:schemeClr val="accent5"/>
+                </a:solidFill>
+              </a:rPr>
+              <a:t>by </a:t>
+            </a:r>
+            <a:r>
+              <a:rPr sz="2400">
+                <a:solidFill>
+                  <a:schemeClr val="accent5"/>
+                </a:solidFill>
+              </a:rPr>
+              <a:t>Tom Irvine</a:t>
             </a:r>
           </a:p>
         </p:txBody>
@@ -3375,24 +3700,62 @@
       <p:grpSpPr/>
       <p:sp>
         <p:nvSpPr>
-          <p:cNvPr id="2" name="Rectangle 1"/>
+          <p:cNvPr id="2" name="Title 1"/>
+          <p:cNvSpPr>
+            <a:spLocks noGrp="1"/>
+          </p:cNvSpPr>
+          <p:nvPr>
+            <p:ph type="ctrTitle"/>
+          </p:nvPr>
+        </p:nvSpPr>
+        <p:spPr/>
+        <p:txBody>
+          <a:bodyPr/>
+          <a:lstStyle/>
+          <a:p/>
+        </p:txBody>
+      </p:sp>
+      <p:sp>
+        <p:nvSpPr>
+          <p:cNvPr id="3" name="Subtitle 2"/>
+          <p:cNvSpPr>
+            <a:spLocks noGrp="1"/>
+          </p:cNvSpPr>
+          <p:nvPr>
+            <p:ph type="subTitle" idx="1"/>
+          </p:nvPr>
+        </p:nvSpPr>
+        <p:spPr/>
+        <p:txBody>
+          <a:bodyPr/>
+          <a:lstStyle/>
+          <a:p/>
+        </p:txBody>
+      </p:sp>
+      <p:sp>
+        <p:nvSpPr>
+          <p:cNvPr id="4" name="Rectangle 3"/>
           <p:cNvSpPr/>
           <p:nvPr/>
         </p:nvSpPr>
         <p:spPr>
           <a:xfrm>
             <a:off x="0" y="0"/>
-            <a:ext cx="12192000" cy="457200"/>
+            <a:ext cx="12191969" cy="457200"/>
           </a:xfrm>
           <a:prstGeom prst="rect">
             <a:avLst/>
           </a:prstGeom>
+          <a:noFill/>
+          <a:ln>
+            <a:noFill/>
+          </a:ln>
         </p:spPr>
         <p:style>
           <a:lnRef idx="1">
             <a:schemeClr val="accent1"/>
           </a:lnRef>
-          <a:fillRef idx="3">
+          <a:fillRef idx="1">
             <a:schemeClr val="accent1"/>
           </a:fillRef>
           <a:effectRef idx="2">
@@ -3412,24 +3775,28 @@
       </p:sp>
       <p:sp>
         <p:nvSpPr>
-          <p:cNvPr id="3" name="Rectangle 2"/>
+          <p:cNvPr id="5" name="Rectangle 4"/>
           <p:cNvSpPr/>
           <p:nvPr/>
         </p:nvSpPr>
         <p:spPr>
           <a:xfrm>
             <a:off x="0" y="457200"/>
-            <a:ext cx="12192000" cy="0"/>
+            <a:ext cx="12191969" cy="0"/>
           </a:xfrm>
           <a:prstGeom prst="rect">
             <a:avLst/>
           </a:prstGeom>
+          <a:noFill/>
+          <a:ln>
+            <a:noFill/>
+          </a:ln>
         </p:spPr>
         <p:style>
           <a:lnRef idx="1">
             <a:schemeClr val="accent1"/>
           </a:lnRef>
-          <a:fillRef idx="3">
+          <a:fillRef idx="1">
             <a:schemeClr val="accent1"/>
           </a:fillRef>
           <a:effectRef idx="2">
@@ -3449,24 +3816,28 @@
       </p:sp>
       <p:sp>
         <p:nvSpPr>
-          <p:cNvPr id="4" name="Rectangle 3"/>
+          <p:cNvPr id="6" name="Rectangle 5"/>
           <p:cNvSpPr/>
           <p:nvPr/>
         </p:nvSpPr>
         <p:spPr>
           <a:xfrm>
-            <a:off x="0" y="4122738"/>
-            <a:ext cx="12192000" cy="457200"/>
+            <a:off x="0" y="4122755"/>
+            <a:ext cx="12191969" cy="457200"/>
           </a:xfrm>
           <a:prstGeom prst="rect">
             <a:avLst/>
           </a:prstGeom>
+          <a:noFill/>
+          <a:ln>
+            <a:noFill/>
+          </a:ln>
         </p:spPr>
         <p:style>
           <a:lnRef idx="1">
             <a:schemeClr val="accent1"/>
           </a:lnRef>
-          <a:fillRef idx="3">
+          <a:fillRef idx="1">
             <a:schemeClr val="accent1"/>
           </a:fillRef>
           <a:effectRef idx="2">
@@ -3486,24 +3857,28 @@
       </p:sp>
       <p:sp>
         <p:nvSpPr>
-          <p:cNvPr id="5" name="Rectangle 4"/>
+          <p:cNvPr id="7" name="Rectangle 6"/>
           <p:cNvSpPr/>
           <p:nvPr/>
         </p:nvSpPr>
         <p:spPr>
           <a:xfrm>
-            <a:off x="0" y="4579938"/>
-            <a:ext cx="12192000" cy="0"/>
+            <a:off x="0" y="4579955"/>
+            <a:ext cx="12191969" cy="0"/>
           </a:xfrm>
           <a:prstGeom prst="rect">
             <a:avLst/>
           </a:prstGeom>
+          <a:noFill/>
+          <a:ln>
+            <a:noFill/>
+          </a:ln>
         </p:spPr>
         <p:style>
           <a:lnRef idx="1">
             <a:schemeClr val="accent1"/>
           </a:lnRef>
-          <a:fillRef idx="3">
+          <a:fillRef idx="1">
             <a:schemeClr val="accent1"/>
           </a:fillRef>
           <a:effectRef idx="2">
@@ -3523,24 +3898,28 @@
       </p:sp>
       <p:sp>
         <p:nvSpPr>
-          <p:cNvPr id="6" name="Rectangle 5"/>
+          <p:cNvPr id="8" name="Rectangle 7"/>
           <p:cNvSpPr/>
           <p:nvPr/>
         </p:nvSpPr>
         <p:spPr>
           <a:xfrm>
-            <a:off x="0" y="7954963"/>
-            <a:ext cx="12192000" cy="457200"/>
+            <a:off x="0" y="7955005"/>
+            <a:ext cx="12191969" cy="457200"/>
           </a:xfrm>
           <a:prstGeom prst="rect">
             <a:avLst/>
           </a:prstGeom>
+          <a:noFill/>
+          <a:ln>
+            <a:noFill/>
+          </a:ln>
         </p:spPr>
         <p:style>
           <a:lnRef idx="1">
             <a:schemeClr val="accent1"/>
           </a:lnRef>
-          <a:fillRef idx="3">
+          <a:fillRef idx="1">
             <a:schemeClr val="accent1"/>
           </a:fillRef>
           <a:effectRef idx="2">
@@ -3558,9 +3937,49 @@
           </a:p>
         </p:txBody>
       </p:sp>
+      <p:sp>
+        <p:nvSpPr>
+          <p:cNvPr id="9" name="Oval 8"/>
+          <p:cNvSpPr/>
+          <p:nvPr/>
+        </p:nvSpPr>
+        <p:spPr>
+          <a:xfrm>
+            <a:off x="2058863" y="4742352"/>
+            <a:ext cx="3683294" cy="314736"/>
+          </a:xfrm>
+          <a:prstGeom prst="ellipse">
+            <a:avLst/>
+          </a:prstGeom>
+          <a:noFill/>
+        </p:spPr>
+        <p:style>
+          <a:lnRef idx="2">
+            <a:schemeClr val="accent1">
+              <a:shade val="50000"/>
+            </a:schemeClr>
+          </a:lnRef>
+          <a:fillRef idx="1">
+            <a:schemeClr val="accent1"/>
+          </a:fillRef>
+          <a:effectRef idx="0">
+            <a:schemeClr val="accent1"/>
+          </a:effectRef>
+          <a:fontRef idx="minor">
+            <a:schemeClr val="lt1"/>
+          </a:fontRef>
+        </p:style>
+        <p:txBody>
+          <a:bodyPr rtlCol="0" anchor="ctr"/>
+          <a:lstStyle/>
+          <a:p>
+            <a:pPr algn="ctr"/>
+          </a:p>
+        </p:txBody>
+      </p:sp>
       <p:pic>
         <p:nvPicPr>
-          <p:cNvPr id="7" name="Picture 6" descr="image1.png"/>
+          <p:cNvPr id="10" name="Picture 9" descr="image1.png"/>
           <p:cNvPicPr>
             <a:picLocks noChangeAspect="1"/>
           </p:cNvPicPr>
@@ -3574,51 +3993,14 @@
         </p:blipFill>
         <p:spPr>
           <a:xfrm>
-            <a:off x="1397863" y="777010"/>
-            <a:ext cx="9396274" cy="5303980"/>
+            <a:off x="1397843" y="776965"/>
+            <a:ext cx="9396282" cy="5303977"/>
           </a:xfrm>
           <a:prstGeom prst="rect">
             <a:avLst/>
           </a:prstGeom>
         </p:spPr>
       </p:pic>
-      <p:sp>
-        <p:nvSpPr>
-          <p:cNvPr id="8" name="Oval 7"/>
-          <p:cNvSpPr/>
-          <p:nvPr/>
-        </p:nvSpPr>
-        <p:spPr>
-          <a:xfrm>
-            <a:off x="2058869" y="4742379"/>
-            <a:ext cx="3683298" cy="314736"/>
-          </a:xfrm>
-          <a:prstGeom prst="ellipse">
-            <a:avLst/>
-          </a:prstGeom>
-        </p:spPr>
-        <p:style>
-          <a:lnRef idx="1">
-            <a:schemeClr val="accent1"/>
-          </a:lnRef>
-          <a:fillRef idx="3">
-            <a:schemeClr val="accent1"/>
-          </a:fillRef>
-          <a:effectRef idx="2">
-            <a:schemeClr val="accent1"/>
-          </a:effectRef>
-          <a:fontRef idx="minor">
-            <a:schemeClr val="lt1"/>
-          </a:fontRef>
-        </p:style>
-        <p:txBody>
-          <a:bodyPr rtlCol="0" anchor="ctr"/>
-          <a:lstStyle/>
-          <a:p>
-            <a:pPr algn="ctr"/>
-          </a:p>
-        </p:txBody>
-      </p:sp>
     </p:spTree>
   </p:cSld>
   <p:clrMapOvr>
@@ -3639,24 +4021,62 @@
       <p:grpSpPr/>
       <p:sp>
         <p:nvSpPr>
-          <p:cNvPr id="2" name="Rectangle 1"/>
+          <p:cNvPr id="2" name="Title 1"/>
+          <p:cNvSpPr>
+            <a:spLocks noGrp="1"/>
+          </p:cNvSpPr>
+          <p:nvPr>
+            <p:ph type="ctrTitle"/>
+          </p:nvPr>
+        </p:nvSpPr>
+        <p:spPr/>
+        <p:txBody>
+          <a:bodyPr/>
+          <a:lstStyle/>
+          <a:p/>
+        </p:txBody>
+      </p:sp>
+      <p:sp>
+        <p:nvSpPr>
+          <p:cNvPr id="3" name="Subtitle 2"/>
+          <p:cNvSpPr>
+            <a:spLocks noGrp="1"/>
+          </p:cNvSpPr>
+          <p:nvPr>
+            <p:ph type="subTitle" idx="1"/>
+          </p:nvPr>
+        </p:nvSpPr>
+        <p:spPr/>
+        <p:txBody>
+          <a:bodyPr/>
+          <a:lstStyle/>
+          <a:p/>
+        </p:txBody>
+      </p:sp>
+      <p:sp>
+        <p:nvSpPr>
+          <p:cNvPr id="4" name="Rectangle 3"/>
           <p:cNvSpPr/>
           <p:nvPr/>
         </p:nvSpPr>
         <p:spPr>
           <a:xfrm>
             <a:off x="0" y="0"/>
-            <a:ext cx="12192000" cy="457200"/>
+            <a:ext cx="12191969" cy="457200"/>
           </a:xfrm>
           <a:prstGeom prst="rect">
             <a:avLst/>
           </a:prstGeom>
+          <a:noFill/>
+          <a:ln>
+            <a:noFill/>
+          </a:ln>
         </p:spPr>
         <p:style>
           <a:lnRef idx="1">
             <a:schemeClr val="accent1"/>
           </a:lnRef>
-          <a:fillRef idx="3">
+          <a:fillRef idx="1">
             <a:schemeClr val="accent1"/>
           </a:fillRef>
           <a:effectRef idx="2">
@@ -3676,24 +4096,28 @@
       </p:sp>
       <p:sp>
         <p:nvSpPr>
-          <p:cNvPr id="3" name="Rectangle 2"/>
+          <p:cNvPr id="5" name="Rectangle 4"/>
           <p:cNvSpPr/>
           <p:nvPr/>
         </p:nvSpPr>
         <p:spPr>
           <a:xfrm>
-            <a:off x="8625385" y="4851779"/>
-            <a:ext cx="12192000" cy="0"/>
+            <a:off x="8625352" y="4851806"/>
+            <a:ext cx="12191969" cy="0"/>
           </a:xfrm>
           <a:prstGeom prst="rect">
             <a:avLst/>
           </a:prstGeom>
+          <a:noFill/>
+          <a:ln>
+            <a:noFill/>
+          </a:ln>
         </p:spPr>
         <p:style>
           <a:lnRef idx="1">
             <a:schemeClr val="accent1"/>
           </a:lnRef>
-          <a:fillRef idx="3">
+          <a:fillRef idx="1">
             <a:schemeClr val="accent1"/>
           </a:fillRef>
           <a:effectRef idx="2">
@@ -3713,24 +4137,28 @@
       </p:sp>
       <p:sp>
         <p:nvSpPr>
-          <p:cNvPr id="4" name="Rectangle 3"/>
+          <p:cNvPr id="6" name="Rectangle 5"/>
           <p:cNvSpPr/>
           <p:nvPr/>
         </p:nvSpPr>
         <p:spPr>
           <a:xfrm>
-            <a:off x="0" y="4122738"/>
-            <a:ext cx="12192000" cy="457200"/>
+            <a:off x="0" y="4122755"/>
+            <a:ext cx="12191969" cy="457200"/>
           </a:xfrm>
           <a:prstGeom prst="rect">
             <a:avLst/>
           </a:prstGeom>
+          <a:noFill/>
+          <a:ln>
+            <a:noFill/>
+          </a:ln>
         </p:spPr>
         <p:style>
           <a:lnRef idx="1">
             <a:schemeClr val="accent1"/>
           </a:lnRef>
-          <a:fillRef idx="3">
+          <a:fillRef idx="1">
             <a:schemeClr val="accent1"/>
           </a:fillRef>
           <a:effectRef idx="2">
@@ -3750,24 +4178,28 @@
       </p:sp>
       <p:sp>
         <p:nvSpPr>
-          <p:cNvPr id="5" name="Rectangle 4"/>
+          <p:cNvPr id="7" name="Rectangle 6"/>
           <p:cNvSpPr/>
           <p:nvPr/>
         </p:nvSpPr>
         <p:spPr>
           <a:xfrm>
-            <a:off x="0" y="4579938"/>
-            <a:ext cx="12192000" cy="0"/>
+            <a:off x="0" y="4579955"/>
+            <a:ext cx="12191969" cy="0"/>
           </a:xfrm>
           <a:prstGeom prst="rect">
             <a:avLst/>
           </a:prstGeom>
+          <a:noFill/>
+          <a:ln>
+            <a:noFill/>
+          </a:ln>
         </p:spPr>
         <p:style>
           <a:lnRef idx="1">
             <a:schemeClr val="accent1"/>
           </a:lnRef>
-          <a:fillRef idx="3">
+          <a:fillRef idx="1">
             <a:schemeClr val="accent1"/>
           </a:fillRef>
           <a:effectRef idx="2">
@@ -3787,24 +4219,28 @@
       </p:sp>
       <p:sp>
         <p:nvSpPr>
-          <p:cNvPr id="6" name="Rectangle 5"/>
+          <p:cNvPr id="8" name="Rectangle 7"/>
           <p:cNvSpPr/>
           <p:nvPr/>
         </p:nvSpPr>
         <p:spPr>
           <a:xfrm>
-            <a:off x="0" y="7954963"/>
-            <a:ext cx="12192000" cy="457200"/>
+            <a:off x="0" y="7955005"/>
+            <a:ext cx="12191969" cy="457200"/>
           </a:xfrm>
           <a:prstGeom prst="rect">
             <a:avLst/>
           </a:prstGeom>
+          <a:noFill/>
+          <a:ln>
+            <a:noFill/>
+          </a:ln>
         </p:spPr>
         <p:style>
           <a:lnRef idx="1">
             <a:schemeClr val="accent1"/>
           </a:lnRef>
-          <a:fillRef idx="3">
+          <a:fillRef idx="1">
             <a:schemeClr val="accent1"/>
           </a:fillRef>
           <a:effectRef idx="2">
@@ -3822,9 +4258,40 @@
           </a:p>
         </p:txBody>
       </p:sp>
+      <p:sp>
+        <p:nvSpPr>
+          <p:cNvPr id="9" name="TextBox 8"/>
+          <p:cNvSpPr txBox="1"/>
+          <p:nvPr/>
+        </p:nvSpPr>
+        <p:spPr>
+          <a:xfrm>
+            <a:off x="10072024" y="1296527"/>
+            <a:ext cx="1815175" cy="923361"/>
+          </a:xfrm>
+          <a:prstGeom prst="rect">
+            <a:avLst/>
+          </a:prstGeom>
+          <a:noFill/>
+        </p:spPr>
+        <p:txBody>
+          <a:bodyPr wrap="square">
+            <a:spAutoFit/>
+          </a:bodyPr>
+          <a:lstStyle/>
+          <a:p>
+            <a:pPr>
+              <a:buNone/>
+            </a:pPr>
+            <a:r>
+              <a:t>Download the newest version &amp; extract the files</a:t>
+            </a:r>
+          </a:p>
+        </p:txBody>
+      </p:sp>
       <p:pic>
         <p:nvPicPr>
-          <p:cNvPr id="7" name="Picture 6" descr="image2.png"/>
+          <p:cNvPr id="10" name="Picture 9" descr="image2.png"/>
           <p:cNvPicPr>
             <a:picLocks noChangeAspect="1"/>
           </p:cNvPicPr>
@@ -3838,53 +4305,14 @@
         </p:blipFill>
         <p:spPr>
           <a:xfrm>
-            <a:off x="451456" y="429356"/>
-            <a:ext cx="9323809" cy="5838095"/>
+            <a:off x="451439" y="429310"/>
+            <a:ext cx="9323771" cy="5838078"/>
           </a:xfrm>
           <a:prstGeom prst="rect">
             <a:avLst/>
           </a:prstGeom>
         </p:spPr>
       </p:pic>
-      <p:sp>
-        <p:nvSpPr>
-          <p:cNvPr id="8" name="Rectangle 7"/>
-          <p:cNvSpPr/>
-          <p:nvPr/>
-        </p:nvSpPr>
-        <p:spPr>
-          <a:xfrm>
-            <a:off x="10072048" y="1296537"/>
-            <a:ext cx="1815152" cy="923330"/>
-          </a:xfrm>
-          <a:prstGeom prst="rect">
-            <a:avLst/>
-          </a:prstGeom>
-        </p:spPr>
-        <p:style>
-          <a:lnRef idx="1">
-            <a:schemeClr val="accent1"/>
-          </a:lnRef>
-          <a:fillRef idx="3">
-            <a:schemeClr val="accent1"/>
-          </a:fillRef>
-          <a:effectRef idx="2">
-            <a:schemeClr val="accent1"/>
-          </a:effectRef>
-          <a:fontRef idx="minor">
-            <a:schemeClr val="lt1"/>
-          </a:fontRef>
-        </p:style>
-        <p:txBody>
-          <a:bodyPr rtlCol="0" anchor="ctr"/>
-          <a:lstStyle/>
-          <a:p>
-            <a:r>
-              <a:t>Download the newest version &amp; extract the files</a:t>
-            </a:r>
-          </a:p>
-        </p:txBody>
-      </p:sp>
     </p:spTree>
   </p:cSld>
   <p:clrMapOvr>
@@ -3903,9 +4331,82 @@
         <p:nvPr/>
       </p:nvGrpSpPr>
       <p:grpSpPr/>
+      <p:sp>
+        <p:nvSpPr>
+          <p:cNvPr id="2" name="Title 1"/>
+          <p:cNvSpPr>
+            <a:spLocks noGrp="1"/>
+          </p:cNvSpPr>
+          <p:nvPr>
+            <p:ph type="title"/>
+          </p:nvPr>
+        </p:nvSpPr>
+        <p:spPr/>
+        <p:txBody>
+          <a:bodyPr/>
+          <a:lstStyle/>
+          <a:p/>
+        </p:txBody>
+      </p:sp>
+      <p:sp>
+        <p:nvSpPr>
+          <p:cNvPr id="3" name="Content Placeholder 2"/>
+          <p:cNvSpPr>
+            <a:spLocks noGrp="1"/>
+          </p:cNvSpPr>
+          <p:nvPr>
+            <p:ph type="obj" idx="1"/>
+          </p:nvPr>
+        </p:nvSpPr>
+        <p:spPr/>
+        <p:txBody>
+          <a:bodyPr/>
+          <a:lstStyle/>
+          <a:p/>
+        </p:txBody>
+      </p:sp>
+      <p:sp>
+        <p:nvSpPr>
+          <p:cNvPr id="4" name="TextBox 3"/>
+          <p:cNvSpPr txBox="1"/>
+          <p:nvPr/>
+        </p:nvSpPr>
+        <p:spPr>
+          <a:xfrm>
+            <a:off x="4203496" y="2579430"/>
+            <a:ext cx="5704758" cy="1200332"/>
+          </a:xfrm>
+          <a:prstGeom prst="rect">
+            <a:avLst/>
+          </a:prstGeom>
+          <a:noFill/>
+        </p:spPr>
+        <p:txBody>
+          <a:bodyPr wrap="square">
+            <a:spAutoFit/>
+          </a:bodyPr>
+          <a:lstStyle/>
+          <a:p>
+            <a:pPr lvl="0">
+              <a:buNone/>
+            </a:pPr>
+            <a:r>
+              <a:t>Set the path to the folder where the files have been extracted to.</a:t>
+            </a:r>
+          </a:p>
+          <a:p>
+            <a:pPr lvl="0">
+              <a:buNone/>
+            </a:pPr>
+            <a:r>
+              <a:t>Then type vibrationdata in the Command Window.</a:t>
+            </a:r>
+          </a:p>
+        </p:txBody>
+      </p:sp>
       <p:pic>
         <p:nvPicPr>
-          <p:cNvPr id="2" name="Picture 1" descr="image3.png"/>
+          <p:cNvPr id="5" name="Picture 4" descr="image3.png"/>
           <p:cNvPicPr>
             <a:picLocks noChangeAspect="1"/>
           </p:cNvPicPr>
@@ -3919,53 +4420,14 @@
         </p:blipFill>
         <p:spPr>
           <a:xfrm>
-            <a:off x="421517" y="300250"/>
-            <a:ext cx="10257143" cy="6133333"/>
+            <a:off x="421538" y="300288"/>
+            <a:ext cx="10257099" cy="6133338"/>
           </a:xfrm>
           <a:prstGeom prst="rect">
             <a:avLst/>
           </a:prstGeom>
         </p:spPr>
       </p:pic>
-      <p:sp>
-        <p:nvSpPr>
-          <p:cNvPr id="3" name="Rectangle 2"/>
-          <p:cNvSpPr/>
-          <p:nvPr/>
-        </p:nvSpPr>
-        <p:spPr>
-          <a:xfrm>
-            <a:off x="4203511" y="2579427"/>
-            <a:ext cx="5704764" cy="1200329"/>
-          </a:xfrm>
-          <a:prstGeom prst="rect">
-            <a:avLst/>
-          </a:prstGeom>
-        </p:spPr>
-        <p:style>
-          <a:lnRef idx="1">
-            <a:schemeClr val="accent1"/>
-          </a:lnRef>
-          <a:fillRef idx="3">
-            <a:schemeClr val="accent1"/>
-          </a:fillRef>
-          <a:effectRef idx="2">
-            <a:schemeClr val="accent1"/>
-          </a:effectRef>
-          <a:fontRef idx="minor">
-            <a:schemeClr val="lt1"/>
-          </a:fontRef>
-        </p:style>
-        <p:txBody>
-          <a:bodyPr rtlCol="0" anchor="ctr"/>
-          <a:lstStyle/>
-          <a:p>
-            <a:r>
-              <a:t>Set the path to the folder where the files have been extracted to.Then type vibrationdata in the Command Window.</a:t>
-            </a:r>
-          </a:p>
-        </p:txBody>
-      </p:sp>
     </p:spTree>
   </p:cSld>
   <p:clrMapOvr>
@@ -3984,9 +4446,43 @@
         <p:nvPr/>
       </p:nvGrpSpPr>
       <p:grpSpPr/>
+      <p:sp>
+        <p:nvSpPr>
+          <p:cNvPr id="2" name="Title 1"/>
+          <p:cNvSpPr>
+            <a:spLocks noGrp="1"/>
+          </p:cNvSpPr>
+          <p:nvPr>
+            <p:ph type="title"/>
+          </p:nvPr>
+        </p:nvSpPr>
+        <p:spPr/>
+        <p:txBody>
+          <a:bodyPr/>
+          <a:lstStyle/>
+          <a:p/>
+        </p:txBody>
+      </p:sp>
+      <p:sp>
+        <p:nvSpPr>
+          <p:cNvPr id="3" name="Content Placeholder 2"/>
+          <p:cNvSpPr>
+            <a:spLocks noGrp="1"/>
+          </p:cNvSpPr>
+          <p:nvPr>
+            <p:ph type="obj" idx="1"/>
+          </p:nvPr>
+        </p:nvSpPr>
+        <p:spPr/>
+        <p:txBody>
+          <a:bodyPr/>
+          <a:lstStyle/>
+          <a:p/>
+        </p:txBody>
+      </p:sp>
       <p:pic>
         <p:nvPicPr>
-          <p:cNvPr id="2" name="Picture 1" descr="image4.png"/>
+          <p:cNvPr id="4" name="Picture 3" descr="image4.png"/>
           <p:cNvPicPr>
             <a:picLocks noChangeAspect="1"/>
           </p:cNvPicPr>
@@ -4000,8 +4496,8 @@
         </p:blipFill>
         <p:spPr>
           <a:xfrm>
-            <a:off x="786476" y="614714"/>
-            <a:ext cx="10619048" cy="5628571"/>
+            <a:off x="786475" y="614751"/>
+            <a:ext cx="10619018" cy="5628589"/>
           </a:xfrm>
           <a:prstGeom prst="rect">
             <a:avLst/>
@@ -4027,44 +4523,44 @@
         <a:sysClr val="window" lastClr="FFFFFF"/>
       </a:lt1>
       <a:dk2>
-        <a:srgbClr val="1F497D"/>
+        <a:srgbClr val="44546A"/>
       </a:dk2>
       <a:lt2>
-        <a:srgbClr val="EEECE1"/>
+        <a:srgbClr val="E7E6E6"/>
       </a:lt2>
       <a:accent1>
-        <a:srgbClr val="4F81BD"/>
+        <a:srgbClr val="4472C4"/>
       </a:accent1>
       <a:accent2>
-        <a:srgbClr val="C0504D"/>
+        <a:srgbClr val="ED7D31"/>
       </a:accent2>
       <a:accent3>
-        <a:srgbClr val="9BBB59"/>
+        <a:srgbClr val="A5A5A5"/>
       </a:accent3>
       <a:accent4>
-        <a:srgbClr val="8064A2"/>
+        <a:srgbClr val="FFC000"/>
       </a:accent4>
       <a:accent5>
-        <a:srgbClr val="4BACC6"/>
+        <a:srgbClr val="5B9BD5"/>
       </a:accent5>
       <a:accent6>
-        <a:srgbClr val="F79646"/>
+        <a:srgbClr val="70AD47"/>
       </a:accent6>
       <a:hlink>
-        <a:srgbClr val="0000FF"/>
+        <a:srgbClr val="0563C1"/>
       </a:hlink>
       <a:folHlink>
-        <a:srgbClr val="800080"/>
+        <a:srgbClr val="954F72"/>
       </a:folHlink>
     </a:clrScheme>
     <a:fontScheme name="Office">
       <a:majorFont>
-        <a:latin typeface="Calibri"/>
+        <a:latin typeface="Calibri Light" panose="020F0302020204030204"/>
         <a:ea typeface=""/>
         <a:cs typeface=""/>
-        <a:font script="Jpan" typeface="ＭＳ Ｐゴシック"/>
+        <a:font script="Jpan" typeface="游ゴシック Light"/>
         <a:font script="Hang" typeface="맑은 고딕"/>
-        <a:font script="Hans" typeface="宋体"/>
+        <a:font script="Hans" typeface="等线 Light"/>
         <a:font script="Hant" typeface="新細明體"/>
         <a:font script="Arab" typeface="Times New Roman"/>
         <a:font script="Hebr" typeface="Times New Roman"/>
@@ -4092,14 +4588,31 @@
         <a:font script="Viet" typeface="Times New Roman"/>
         <a:font script="Uigh" typeface="Microsoft Uighur"/>
         <a:font script="Geor" typeface="Sylfaen"/>
+        <a:font script="Armn" typeface="Arial"/>
+        <a:font script="Bugi" typeface="Leelawadee UI"/>
+        <a:font script="Bopo" typeface="Microsoft JhengHei"/>
+        <a:font script="Java" typeface="Javanese Text"/>
+        <a:font script="Lisu" typeface="Segoe UI"/>
+        <a:font script="Mymr" typeface="Myanmar Text"/>
+        <a:font script="Nkoo" typeface="Ebrima"/>
+        <a:font script="Olck" typeface="Nirmala UI"/>
+        <a:font script="Osma" typeface="Ebrima"/>
+        <a:font script="Phag" typeface="Phagspa"/>
+        <a:font script="Syrn" typeface="Estrangelo Edessa"/>
+        <a:font script="Syrj" typeface="Estrangelo Edessa"/>
+        <a:font script="Syre" typeface="Estrangelo Edessa"/>
+        <a:font script="Sora" typeface="Nirmala UI"/>
+        <a:font script="Tale" typeface="Microsoft Tai Le"/>
+        <a:font script="Talu" typeface="Microsoft New Tai Lue"/>
+        <a:font script="Tfng" typeface="Ebrima"/>
       </a:majorFont>
       <a:minorFont>
-        <a:latin typeface="Calibri"/>
+        <a:latin typeface="Calibri" panose="020F0502020204030204"/>
         <a:ea typeface=""/>
         <a:cs typeface=""/>
-        <a:font script="Jpan" typeface="ＭＳ Ｐゴシック"/>
+        <a:font script="Jpan" typeface="游ゴシック"/>
         <a:font script="Hang" typeface="맑은 고딕"/>
-        <a:font script="Hans" typeface="宋体"/>
+        <a:font script="Hans" typeface="等线"/>
         <a:font script="Hant" typeface="新細明體"/>
         <a:font script="Arab" typeface="Arial"/>
         <a:font script="Hebr" typeface="Arial"/>
@@ -4127,6 +4640,23 @@
         <a:font script="Viet" typeface="Arial"/>
         <a:font script="Uigh" typeface="Microsoft Uighur"/>
         <a:font script="Geor" typeface="Sylfaen"/>
+        <a:font script="Armn" typeface="Arial"/>
+        <a:font script="Bugi" typeface="Leelawadee UI"/>
+        <a:font script="Bopo" typeface="Microsoft JhengHei"/>
+        <a:font script="Java" typeface="Javanese Text"/>
+        <a:font script="Lisu" typeface="Segoe UI"/>
+        <a:font script="Mymr" typeface="Myanmar Text"/>
+        <a:font script="Nkoo" typeface="Ebrima"/>
+        <a:font script="Olck" typeface="Nirmala UI"/>
+        <a:font script="Osma" typeface="Ebrima"/>
+        <a:font script="Phag" typeface="Phagspa"/>
+        <a:font script="Syrn" typeface="Estrangelo Edessa"/>
+        <a:font script="Syrj" typeface="Estrangelo Edessa"/>
+        <a:font script="Syre" typeface="Estrangelo Edessa"/>
+        <a:font script="Sora" typeface="Nirmala UI"/>
+        <a:font script="Tale" typeface="Microsoft Tai Le"/>
+        <a:font script="Talu" typeface="Microsoft New Tai Lue"/>
+        <a:font script="Tfng" typeface="Ebrima"/>
       </a:minorFont>
     </a:fontScheme>
     <a:fmtScheme name="Office">
@@ -4138,200 +4668,141 @@
           <a:gsLst>
             <a:gs pos="0">
               <a:schemeClr val="phClr">
-                <a:tint val="50000"/>
-                <a:satMod val="300000"/>
+                <a:lumMod val="110000"/>
+                <a:satMod val="105000"/>
+                <a:tint val="67000"/>
               </a:schemeClr>
             </a:gs>
-            <a:gs pos="35000">
+            <a:gs pos="50000">
               <a:schemeClr val="phClr">
-                <a:tint val="37000"/>
-                <a:satMod val="300000"/>
+                <a:lumMod val="105000"/>
+                <a:satMod val="103000"/>
+                <a:tint val="73000"/>
               </a:schemeClr>
             </a:gs>
             <a:gs pos="100000">
               <a:schemeClr val="phClr">
-                <a:tint val="15000"/>
-                <a:satMod val="350000"/>
+                <a:lumMod val="105000"/>
+                <a:satMod val="109000"/>
+                <a:tint val="81000"/>
               </a:schemeClr>
             </a:gs>
           </a:gsLst>
-          <a:lin ang="16200000" scaled="1"/>
+          <a:lin ang="5400000" scaled="0"/>
         </a:gradFill>
         <a:gradFill rotWithShape="1">
           <a:gsLst>
             <a:gs pos="0">
               <a:schemeClr val="phClr">
-                <a:tint val="100000"/>
+                <a:satMod val="103000"/>
+                <a:lumMod val="102000"/>
+                <a:tint val="94000"/>
+              </a:schemeClr>
+            </a:gs>
+            <a:gs pos="50000">
+              <a:schemeClr val="phClr">
+                <a:satMod val="110000"/>
+                <a:lumMod val="100000"/>
                 <a:shade val="100000"/>
-                <a:satMod val="130000"/>
               </a:schemeClr>
             </a:gs>
             <a:gs pos="100000">
               <a:schemeClr val="phClr">
-                <a:tint val="50000"/>
-                <a:shade val="100000"/>
-                <a:satMod val="350000"/>
+                <a:lumMod val="99000"/>
+                <a:satMod val="120000"/>
+                <a:shade val="78000"/>
               </a:schemeClr>
             </a:gs>
           </a:gsLst>
-          <a:lin ang="16200000" scaled="0"/>
+          <a:lin ang="5400000" scaled="0"/>
         </a:gradFill>
       </a:fillStyleLst>
       <a:lnStyleLst>
-        <a:ln w="9525" cap="flat" cmpd="sng" algn="ctr">
-          <a:solidFill>
-            <a:schemeClr val="phClr">
-              <a:shade val="95000"/>
-              <a:satMod val="105000"/>
-            </a:schemeClr>
-          </a:solidFill>
-          <a:prstDash val="solid"/>
-        </a:ln>
-        <a:ln w="25400" cap="flat" cmpd="sng" algn="ctr">
+        <a:ln w="6350" cap="flat" cmpd="sng" algn="ctr">
           <a:solidFill>
             <a:schemeClr val="phClr"/>
           </a:solidFill>
           <a:prstDash val="solid"/>
+          <a:miter lim="800000"/>
         </a:ln>
-        <a:ln w="38100" cap="flat" cmpd="sng" algn="ctr">
+        <a:ln w="12700" cap="flat" cmpd="sng" algn="ctr">
           <a:solidFill>
             <a:schemeClr val="phClr"/>
           </a:solidFill>
           <a:prstDash val="solid"/>
+          <a:miter lim="800000"/>
+        </a:ln>
+        <a:ln w="19050" cap="flat" cmpd="sng" algn="ctr">
+          <a:solidFill>
+            <a:schemeClr val="phClr"/>
+          </a:solidFill>
+          <a:prstDash val="solid"/>
+          <a:miter lim="800000"/>
         </a:ln>
       </a:lnStyleLst>
       <a:effectStyleLst>
         <a:effectStyle>
+          <a:effectLst/>
+        </a:effectStyle>
+        <a:effectStyle>
+          <a:effectLst/>
+        </a:effectStyle>
+        <a:effectStyle>
           <a:effectLst>
-            <a:outerShdw blurRad="40000" dist="20000" dir="5400000" rotWithShape="0">
+            <a:outerShdw blurRad="57150" dist="19050" dir="5400000" algn="ctr" rotWithShape="0">
               <a:srgbClr val="000000">
-                <a:alpha val="38000"/>
+                <a:alpha val="63000"/>
               </a:srgbClr>
             </a:outerShdw>
           </a:effectLst>
-        </a:effectStyle>
-        <a:effectStyle>
-          <a:effectLst>
-            <a:outerShdw blurRad="40000" dist="23000" dir="5400000" rotWithShape="0">
-              <a:srgbClr val="000000">
-                <a:alpha val="35000"/>
-              </a:srgbClr>
-            </a:outerShdw>
-          </a:effectLst>
-        </a:effectStyle>
-        <a:effectStyle>
-          <a:effectLst>
-            <a:outerShdw blurRad="40000" dist="23000" dir="5400000" rotWithShape="0">
-              <a:srgbClr val="000000">
-                <a:alpha val="35000"/>
-              </a:srgbClr>
-            </a:outerShdw>
-          </a:effectLst>
-          <a:scene3d>
-            <a:camera prst="orthographicFront">
-              <a:rot lat="0" lon="0" rev="0"/>
-            </a:camera>
-            <a:lightRig rig="threePt" dir="t">
-              <a:rot lat="0" lon="0" rev="1200000"/>
-            </a:lightRig>
-          </a:scene3d>
-          <a:sp3d>
-            <a:bevelT w="63500" h="25400"/>
-          </a:sp3d>
         </a:effectStyle>
       </a:effectStyleLst>
       <a:bgFillStyleLst>
         <a:solidFill>
           <a:schemeClr val="phClr"/>
         </a:solidFill>
+        <a:solidFill>
+          <a:schemeClr val="phClr">
+            <a:tint val="95000"/>
+            <a:satMod val="170000"/>
+          </a:schemeClr>
+        </a:solidFill>
         <a:gradFill rotWithShape="1">
           <a:gsLst>
             <a:gs pos="0">
               <a:schemeClr val="phClr">
-                <a:tint val="40000"/>
-                <a:satMod val="350000"/>
+                <a:tint val="93000"/>
+                <a:satMod val="150000"/>
+                <a:shade val="98000"/>
+                <a:lumMod val="102000"/>
               </a:schemeClr>
             </a:gs>
-            <a:gs pos="40000">
+            <a:gs pos="50000">
               <a:schemeClr val="phClr">
-                <a:tint val="45000"/>
-                <a:shade val="99000"/>
-                <a:satMod val="350000"/>
+                <a:tint val="98000"/>
+                <a:satMod val="130000"/>
+                <a:shade val="90000"/>
+                <a:lumMod val="103000"/>
               </a:schemeClr>
             </a:gs>
             <a:gs pos="100000">
               <a:schemeClr val="phClr">
-                <a:shade val="20000"/>
-                <a:satMod val="255000"/>
+                <a:shade val="63000"/>
+                <a:satMod val="120000"/>
               </a:schemeClr>
             </a:gs>
           </a:gsLst>
-          <a:path path="circle">
-            <a:fillToRect l="50000" t="-80000" r="50000" b="180000"/>
-          </a:path>
-        </a:gradFill>
-        <a:gradFill rotWithShape="1">
-          <a:gsLst>
-            <a:gs pos="0">
-              <a:schemeClr val="phClr">
-                <a:tint val="80000"/>
-                <a:satMod val="300000"/>
-              </a:schemeClr>
-            </a:gs>
-            <a:gs pos="100000">
-              <a:schemeClr val="phClr">
-                <a:shade val="30000"/>
-                <a:satMod val="200000"/>
-              </a:schemeClr>
-            </a:gs>
-          </a:gsLst>
-          <a:path path="circle">
-            <a:fillToRect l="50000" t="50000" r="50000" b="50000"/>
-          </a:path>
+          <a:lin ang="5400000" scaled="0"/>
         </a:gradFill>
       </a:bgFillStyleLst>
     </a:fmtScheme>
   </a:themeElements>
-  <a:objectDefaults>
-    <a:spDef>
-      <a:spPr/>
-      <a:bodyPr/>
-      <a:lstStyle/>
-      <a:style>
-        <a:lnRef idx="1">
-          <a:schemeClr val="accent1"/>
-        </a:lnRef>
-        <a:fillRef idx="3">
-          <a:schemeClr val="accent1"/>
-        </a:fillRef>
-        <a:effectRef idx="2">
-          <a:schemeClr val="accent1"/>
-        </a:effectRef>
-        <a:fontRef idx="minor">
-          <a:schemeClr val="lt1"/>
-        </a:fontRef>
-      </a:style>
-    </a:spDef>
-    <a:lnDef>
-      <a:spPr/>
-      <a:bodyPr/>
-      <a:lstStyle/>
-      <a:style>
-        <a:lnRef idx="2">
-          <a:schemeClr val="accent1"/>
-        </a:lnRef>
-        <a:fillRef idx="0">
-          <a:schemeClr val="accent1"/>
-        </a:fillRef>
-        <a:effectRef idx="1">
-          <a:schemeClr val="accent1"/>
-        </a:effectRef>
-        <a:fontRef idx="minor">
-          <a:schemeClr val="tx1"/>
-        </a:fontRef>
-      </a:style>
-    </a:lnDef>
-  </a:objectDefaults>
+  <a:objectDefaults/>
   <a:extraClrSchemeLst/>
+  <a:extLst>
+    <a:ext uri="{05A4C25C-085E-4340-85A3-A5531E510DB2}">
+      <thm15:themeFamily xmlns:thm15="http://schemas.microsoft.com/office/thememl/2012/main" name="Office Theme" id="{62F939B6-93AF-4DB8-9C6B-D6C7DFDC589F}" vid="{4A3C46E8-61CC-4603-A589-7422A47A8E4A}"/>
+    </a:ext>
+  </a:extLst>
 </a:theme>
 </file>